--- a/Docs/Progress_Check_Box.pptx
+++ b/Docs/Progress_Check_Box.pptx
@@ -227,7 +227,7 @@
           <a:p>
             <a:fld id="{9CD5D8E4-A320-4C82-BF1E-497B145FD5B9}" type="datetimeFigureOut">
               <a:rPr lang="en-US" smtClean="0"/>
-              <a:t>2/18/2026</a:t>
+              <a:t>2/24/2026</a:t>
             </a:fld>
             <a:endParaRPr lang="en-US"/>
           </a:p>
@@ -809,7 +809,7 @@
           <a:p>
             <a:fld id="{B1CD814F-3A2E-4FCD-B679-678770FA1B7D}" type="datetimeFigureOut">
               <a:rPr lang="en-US" smtClean="0"/>
-              <a:t>2/18/2026</a:t>
+              <a:t>2/24/2026</a:t>
             </a:fld>
             <a:endParaRPr lang="en-US"/>
           </a:p>
@@ -1007,7 +1007,7 @@
           <a:p>
             <a:fld id="{B1CD814F-3A2E-4FCD-B679-678770FA1B7D}" type="datetimeFigureOut">
               <a:rPr lang="en-US" smtClean="0"/>
-              <a:t>2/18/2026</a:t>
+              <a:t>2/24/2026</a:t>
             </a:fld>
             <a:endParaRPr lang="en-US"/>
           </a:p>
@@ -1215,7 +1215,7 @@
           <a:p>
             <a:fld id="{B1CD814F-3A2E-4FCD-B679-678770FA1B7D}" type="datetimeFigureOut">
               <a:rPr lang="en-US" smtClean="0"/>
-              <a:t>2/18/2026</a:t>
+              <a:t>2/24/2026</a:t>
             </a:fld>
             <a:endParaRPr lang="en-US"/>
           </a:p>
@@ -1413,7 +1413,7 @@
           <a:p>
             <a:fld id="{B1CD814F-3A2E-4FCD-B679-678770FA1B7D}" type="datetimeFigureOut">
               <a:rPr lang="en-US" smtClean="0"/>
-              <a:t>2/18/2026</a:t>
+              <a:t>2/24/2026</a:t>
             </a:fld>
             <a:endParaRPr lang="en-US"/>
           </a:p>
@@ -1688,7 +1688,7 @@
           <a:p>
             <a:fld id="{B1CD814F-3A2E-4FCD-B679-678770FA1B7D}" type="datetimeFigureOut">
               <a:rPr lang="en-US" smtClean="0"/>
-              <a:t>2/18/2026</a:t>
+              <a:t>2/24/2026</a:t>
             </a:fld>
             <a:endParaRPr lang="en-US"/>
           </a:p>
@@ -1953,7 +1953,7 @@
           <a:p>
             <a:fld id="{B1CD814F-3A2E-4FCD-B679-678770FA1B7D}" type="datetimeFigureOut">
               <a:rPr lang="en-US" smtClean="0"/>
-              <a:t>2/18/2026</a:t>
+              <a:t>2/24/2026</a:t>
             </a:fld>
             <a:endParaRPr lang="en-US"/>
           </a:p>
@@ -2365,7 +2365,7 @@
           <a:p>
             <a:fld id="{B1CD814F-3A2E-4FCD-B679-678770FA1B7D}" type="datetimeFigureOut">
               <a:rPr lang="en-US" smtClean="0"/>
-              <a:t>2/18/2026</a:t>
+              <a:t>2/24/2026</a:t>
             </a:fld>
             <a:endParaRPr lang="en-US"/>
           </a:p>
@@ -2506,7 +2506,7 @@
           <a:p>
             <a:fld id="{B1CD814F-3A2E-4FCD-B679-678770FA1B7D}" type="datetimeFigureOut">
               <a:rPr lang="en-US" smtClean="0"/>
-              <a:t>2/18/2026</a:t>
+              <a:t>2/24/2026</a:t>
             </a:fld>
             <a:endParaRPr lang="en-US"/>
           </a:p>
@@ -2619,7 +2619,7 @@
           <a:p>
             <a:fld id="{B1CD814F-3A2E-4FCD-B679-678770FA1B7D}" type="datetimeFigureOut">
               <a:rPr lang="en-US" smtClean="0"/>
-              <a:t>2/18/2026</a:t>
+              <a:t>2/24/2026</a:t>
             </a:fld>
             <a:endParaRPr lang="en-US"/>
           </a:p>
@@ -2930,7 +2930,7 @@
           <a:p>
             <a:fld id="{B1CD814F-3A2E-4FCD-B679-678770FA1B7D}" type="datetimeFigureOut">
               <a:rPr lang="en-US" smtClean="0"/>
-              <a:t>2/18/2026</a:t>
+              <a:t>2/24/2026</a:t>
             </a:fld>
             <a:endParaRPr lang="en-US"/>
           </a:p>
@@ -3218,7 +3218,7 @@
           <a:p>
             <a:fld id="{B1CD814F-3A2E-4FCD-B679-678770FA1B7D}" type="datetimeFigureOut">
               <a:rPr lang="en-US" smtClean="0"/>
-              <a:t>2/18/2026</a:t>
+              <a:t>2/24/2026</a:t>
             </a:fld>
             <a:endParaRPr lang="en-US"/>
           </a:p>
@@ -3459,7 +3459,7 @@
           <a:p>
             <a:fld id="{B1CD814F-3A2E-4FCD-B679-678770FA1B7D}" type="datetimeFigureOut">
               <a:rPr lang="en-US" smtClean="0"/>
-              <a:t>2/18/2026</a:t>
+              <a:t>2/24/2026</a:t>
             </a:fld>
             <a:endParaRPr lang="en-US"/>
           </a:p>
@@ -5068,7 +5068,7 @@
         </p:spPr>
         <p:txBody>
           <a:bodyPr>
-            <a:normAutofit/>
+            <a:normAutofit lnSpcReduction="10000"/>
           </a:bodyPr>
           <a:lstStyle/>
           <a:p>
@@ -5103,6 +5103,22 @@
               <a:rPr lang="en-US" sz="1600" dirty="0"/>
               <a:t> – ✅</a:t>
             </a:r>
+          </a:p>
+          <a:p>
+            <a:pPr algn="l"/>
+            <a:r>
+              <a:rPr lang="en-US" sz="1600" dirty="0" err="1"/>
+              <a:t>is_ip_address_field_valid</a:t>
+            </a:r>
+            <a:r>
+              <a:rPr lang="en-US" sz="1600" dirty="0"/>
+              <a:t> </a:t>
+            </a:r>
+            <a:r>
+              <a:rPr lang="en-US" sz="1600"/>
+              <a:t>- ✅</a:t>
+            </a:r>
+            <a:endParaRPr lang="en-US" sz="1600" dirty="0"/>
           </a:p>
           <a:p>
             <a:pPr algn="l"/>
@@ -5342,6 +5358,17 @@
             <a:pPr algn="l"/>
             <a:r>
               <a:rPr lang="en-US" sz="1600" dirty="0" err="1"/>
+              <a:t>is_contact_port_field_valid</a:t>
+            </a:r>
+            <a:r>
+              <a:rPr lang="en-US" sz="1600" dirty="0"/>
+              <a:t> - ✅</a:t>
+            </a:r>
+          </a:p>
+          <a:p>
+            <a:pPr algn="l"/>
+            <a:r>
+              <a:rPr lang="en-US" sz="1600" dirty="0" err="1"/>
               <a:t>set_performance_transport_protocol</a:t>
             </a:r>
             <a:r>
@@ -5583,6 +5610,18 @@
             <a:r>
               <a:rPr lang="en-US" sz="1800" dirty="0" err="1"/>
               <a:t>click_start_discovery</a:t>
+            </a:r>
+            <a:r>
+              <a:rPr lang="en-US" sz="1800" dirty="0"/>
+              <a:t> - ✅</a:t>
+            </a:r>
+            <a:endParaRPr lang="he-IL" sz="1800" dirty="0"/>
+          </a:p>
+          <a:p>
+            <a:pPr algn="l"/>
+            <a:r>
+              <a:rPr lang="en-US" sz="1800" dirty="0" err="1"/>
+              <a:t>is_start_discovery_btn_enabled</a:t>
             </a:r>
             <a:r>
               <a:rPr lang="en-US" sz="1800" dirty="0"/>
@@ -9427,7 +9466,7 @@
         </p:spPr>
         <p:txBody>
           <a:bodyPr>
-            <a:normAutofit/>
+            <a:normAutofit fontScale="92500" lnSpcReduction="10000"/>
           </a:bodyPr>
           <a:lstStyle/>
           <a:p>
@@ -9473,6 +9512,33 @@
               <a:rPr lang="en-US" sz="1600" dirty="0"/>
               <a:t> – ✅</a:t>
             </a:r>
+          </a:p>
+          <a:p>
+            <a:pPr algn="l"/>
+            <a:r>
+              <a:rPr lang="en-US" sz="1600" dirty="0" err="1"/>
+              <a:t>get_navigation_info_elements_list</a:t>
+            </a:r>
+            <a:r>
+              <a:rPr lang="en-US" sz="1600" dirty="0"/>
+              <a:t> – ✅</a:t>
+            </a:r>
+          </a:p>
+          <a:p>
+            <a:pPr algn="l"/>
+            <a:r>
+              <a:rPr lang="en-US" sz="1600" dirty="0" err="1"/>
+              <a:t>is_element_exist_on_navigation_info_list</a:t>
+            </a:r>
+            <a:r>
+              <a:rPr lang="en-US" sz="1600" dirty="0"/>
+              <a:t> </a:t>
+            </a:r>
+            <a:r>
+              <a:rPr lang="en-US" sz="1600"/>
+              <a:t>– ✅</a:t>
+            </a:r>
+            <a:endParaRPr lang="en-US" sz="1600" dirty="0"/>
           </a:p>
           <a:p>
             <a:pPr algn="l"/>

--- a/Docs/Progress_Check_Box.pptx
+++ b/Docs/Progress_Check_Box.pptx
@@ -227,7 +227,7 @@
           <a:p>
             <a:fld id="{9CD5D8E4-A320-4C82-BF1E-497B145FD5B9}" type="datetimeFigureOut">
               <a:rPr lang="en-US" smtClean="0"/>
-              <a:t>2/24/2026</a:t>
+              <a:t>3/18/2026</a:t>
             </a:fld>
             <a:endParaRPr lang="en-US"/>
           </a:p>
@@ -809,7 +809,7 @@
           <a:p>
             <a:fld id="{B1CD814F-3A2E-4FCD-B679-678770FA1B7D}" type="datetimeFigureOut">
               <a:rPr lang="en-US" smtClean="0"/>
-              <a:t>2/24/2026</a:t>
+              <a:t>3/18/2026</a:t>
             </a:fld>
             <a:endParaRPr lang="en-US"/>
           </a:p>
@@ -1007,7 +1007,7 @@
           <a:p>
             <a:fld id="{B1CD814F-3A2E-4FCD-B679-678770FA1B7D}" type="datetimeFigureOut">
               <a:rPr lang="en-US" smtClean="0"/>
-              <a:t>2/24/2026</a:t>
+              <a:t>3/18/2026</a:t>
             </a:fld>
             <a:endParaRPr lang="en-US"/>
           </a:p>
@@ -1215,7 +1215,7 @@
           <a:p>
             <a:fld id="{B1CD814F-3A2E-4FCD-B679-678770FA1B7D}" type="datetimeFigureOut">
               <a:rPr lang="en-US" smtClean="0"/>
-              <a:t>2/24/2026</a:t>
+              <a:t>3/18/2026</a:t>
             </a:fld>
             <a:endParaRPr lang="en-US"/>
           </a:p>
@@ -1413,7 +1413,7 @@
           <a:p>
             <a:fld id="{B1CD814F-3A2E-4FCD-B679-678770FA1B7D}" type="datetimeFigureOut">
               <a:rPr lang="en-US" smtClean="0"/>
-              <a:t>2/24/2026</a:t>
+              <a:t>3/18/2026</a:t>
             </a:fld>
             <a:endParaRPr lang="en-US"/>
           </a:p>
@@ -1688,7 +1688,7 @@
           <a:p>
             <a:fld id="{B1CD814F-3A2E-4FCD-B679-678770FA1B7D}" type="datetimeFigureOut">
               <a:rPr lang="en-US" smtClean="0"/>
-              <a:t>2/24/2026</a:t>
+              <a:t>3/18/2026</a:t>
             </a:fld>
             <a:endParaRPr lang="en-US"/>
           </a:p>
@@ -1953,7 +1953,7 @@
           <a:p>
             <a:fld id="{B1CD814F-3A2E-4FCD-B679-678770FA1B7D}" type="datetimeFigureOut">
               <a:rPr lang="en-US" smtClean="0"/>
-              <a:t>2/24/2026</a:t>
+              <a:t>3/18/2026</a:t>
             </a:fld>
             <a:endParaRPr lang="en-US"/>
           </a:p>
@@ -2365,7 +2365,7 @@
           <a:p>
             <a:fld id="{B1CD814F-3A2E-4FCD-B679-678770FA1B7D}" type="datetimeFigureOut">
               <a:rPr lang="en-US" smtClean="0"/>
-              <a:t>2/24/2026</a:t>
+              <a:t>3/18/2026</a:t>
             </a:fld>
             <a:endParaRPr lang="en-US"/>
           </a:p>
@@ -2506,7 +2506,7 @@
           <a:p>
             <a:fld id="{B1CD814F-3A2E-4FCD-B679-678770FA1B7D}" type="datetimeFigureOut">
               <a:rPr lang="en-US" smtClean="0"/>
-              <a:t>2/24/2026</a:t>
+              <a:t>3/18/2026</a:t>
             </a:fld>
             <a:endParaRPr lang="en-US"/>
           </a:p>
@@ -2619,7 +2619,7 @@
           <a:p>
             <a:fld id="{B1CD814F-3A2E-4FCD-B679-678770FA1B7D}" type="datetimeFigureOut">
               <a:rPr lang="en-US" smtClean="0"/>
-              <a:t>2/24/2026</a:t>
+              <a:t>3/18/2026</a:t>
             </a:fld>
             <a:endParaRPr lang="en-US"/>
           </a:p>
@@ -2930,7 +2930,7 @@
           <a:p>
             <a:fld id="{B1CD814F-3A2E-4FCD-B679-678770FA1B7D}" type="datetimeFigureOut">
               <a:rPr lang="en-US" smtClean="0"/>
-              <a:t>2/24/2026</a:t>
+              <a:t>3/18/2026</a:t>
             </a:fld>
             <a:endParaRPr lang="en-US"/>
           </a:p>
@@ -3218,7 +3218,7 @@
           <a:p>
             <a:fld id="{B1CD814F-3A2E-4FCD-B679-678770FA1B7D}" type="datetimeFigureOut">
               <a:rPr lang="en-US" smtClean="0"/>
-              <a:t>2/24/2026</a:t>
+              <a:t>3/18/2026</a:t>
             </a:fld>
             <a:endParaRPr lang="en-US"/>
           </a:p>
@@ -3459,7 +3459,7 @@
           <a:p>
             <a:fld id="{B1CD814F-3A2E-4FCD-B679-678770FA1B7D}" type="datetimeFigureOut">
               <a:rPr lang="en-US" smtClean="0"/>
-              <a:t>2/24/2026</a:t>
+              <a:t>3/18/2026</a:t>
             </a:fld>
             <a:endParaRPr lang="en-US"/>
           </a:p>
@@ -6931,6 +6931,40 @@
             <a:pPr algn="l"/>
             <a:r>
               <a:rPr lang="en-US" sz="1600" dirty="0" err="1"/>
+              <a:t>select_devices_type_filterBy_device_type</a:t>
+            </a:r>
+            <a:r>
+              <a:rPr lang="en-US" sz="1600"/>
+              <a:t> - ✅</a:t>
+            </a:r>
+            <a:endParaRPr lang="en-US" sz="1600" dirty="0"/>
+          </a:p>
+          <a:p>
+            <a:pPr algn="l"/>
+            <a:r>
+              <a:rPr lang="en-US" sz="1600" dirty="0" err="1"/>
+              <a:t>get_selected_devices_type_filterBy_device_type</a:t>
+            </a:r>
+            <a:r>
+              <a:rPr lang="en-US" sz="1600" dirty="0"/>
+              <a:t> - ✅</a:t>
+            </a:r>
+          </a:p>
+          <a:p>
+            <a:pPr algn="l"/>
+            <a:r>
+              <a:rPr lang="en-US" sz="1600" dirty="0" err="1"/>
+              <a:t>select_all_devices_type_filterBy_device_type</a:t>
+            </a:r>
+            <a:r>
+              <a:rPr lang="en-US" sz="1600" dirty="0"/>
+              <a:t> - ✅</a:t>
+            </a:r>
+          </a:p>
+          <a:p>
+            <a:pPr algn="l"/>
+            <a:r>
+              <a:rPr lang="en-US" sz="1600" dirty="0" err="1"/>
               <a:t>set_from_date</a:t>
             </a:r>
             <a:r>
@@ -7841,7 +7875,7 @@
             </a:r>
             <a:r>
               <a:rPr lang="en-US" sz="1600" dirty="0"/>
-              <a:t> – </a:t>
+              <a:t> – ✅</a:t>
             </a:r>
           </a:p>
           <a:p>
@@ -7852,7 +7886,18 @@
             </a:r>
             <a:r>
               <a:rPr lang="en-US" sz="1600" dirty="0"/>
-              <a:t> –</a:t>
+              <a:t> – ✅</a:t>
+            </a:r>
+          </a:p>
+          <a:p>
+            <a:pPr algn="l"/>
+            <a:r>
+              <a:rPr lang="en-US" sz="1600" dirty="0" err="1"/>
+              <a:t>click_back_to_sub_domain_map</a:t>
+            </a:r>
+            <a:r>
+              <a:rPr lang="en-US" sz="1600" dirty="0"/>
+              <a:t> - ✅</a:t>
             </a:r>
           </a:p>
           <a:p>
@@ -7937,7 +7982,15 @@
                   <a:srgbClr val="FFFF00"/>
                 </a:highlight>
               </a:rPr>
-              <a:t>Summary: 75%</a:t>
+              <a:t>Summary</a:t>
+            </a:r>
+            <a:r>
+              <a:rPr lang="en-US" b="1">
+                <a:highlight>
+                  <a:srgbClr val="FFFF00"/>
+                </a:highlight>
+              </a:rPr>
+              <a:t>: 88%</a:t>
             </a:r>
             <a:endParaRPr lang="en-US" sz="1200" b="1" dirty="0">
               <a:highlight>
@@ -9170,7 +9223,7 @@
         </p:spPr>
         <p:txBody>
           <a:bodyPr>
-            <a:normAutofit fontScale="92500" lnSpcReduction="10000"/>
+            <a:normAutofit fontScale="92500" lnSpcReduction="20000"/>
           </a:bodyPr>
           <a:lstStyle/>
           <a:p>
@@ -9347,6 +9400,21 @@
             <a:r>
               <a:rPr lang="en-US" sz="1600" dirty="0"/>
               <a:t> - ✅</a:t>
+            </a:r>
+          </a:p>
+          <a:p>
+            <a:pPr algn="l"/>
+            <a:r>
+              <a:rPr lang="en-US" sz="1600" dirty="0" err="1"/>
+              <a:t>get_map_element_color</a:t>
+            </a:r>
+            <a:r>
+              <a:rPr lang="en-US" sz="1600"/>
+              <a:t> - </a:t>
+            </a:r>
+            <a:r>
+              <a:rPr lang="en-US" sz="1600" dirty="0"/>
+              <a:t>✅</a:t>
             </a:r>
           </a:p>
           <a:p>

--- a/Docs/Progress_Check_Box.pptx
+++ b/Docs/Progress_Check_Box.pptx
@@ -5,7 +5,7 @@
     <p:sldMasterId id="2147483648" r:id="rId1"/>
   </p:sldMasterIdLst>
   <p:notesMasterIdLst>
-    <p:notesMasterId r:id="rId33"/>
+    <p:notesMasterId r:id="rId35"/>
   </p:notesMasterIdLst>
   <p:sldIdLst>
     <p:sldId id="272" r:id="rId2"/>
@@ -15,30 +15,32 @@
     <p:sldId id="274" r:id="rId6"/>
     <p:sldId id="258" r:id="rId7"/>
     <p:sldId id="259" r:id="rId8"/>
-    <p:sldId id="275" r:id="rId9"/>
-    <p:sldId id="260" r:id="rId10"/>
-    <p:sldId id="268" r:id="rId11"/>
-    <p:sldId id="284" r:id="rId12"/>
+    <p:sldId id="287" r:id="rId9"/>
+    <p:sldId id="275" r:id="rId10"/>
+    <p:sldId id="284" r:id="rId11"/>
+    <p:sldId id="288" r:id="rId12"/>
     <p:sldId id="276" r:id="rId13"/>
     <p:sldId id="261" r:id="rId14"/>
-    <p:sldId id="277" r:id="rId15"/>
-    <p:sldId id="267" r:id="rId16"/>
-    <p:sldId id="278" r:id="rId17"/>
-    <p:sldId id="262" r:id="rId18"/>
-    <p:sldId id="269" r:id="rId19"/>
-    <p:sldId id="285" r:id="rId20"/>
-    <p:sldId id="279" r:id="rId21"/>
-    <p:sldId id="263" r:id="rId22"/>
-    <p:sldId id="280" r:id="rId23"/>
-    <p:sldId id="264" r:id="rId24"/>
-    <p:sldId id="281" r:id="rId25"/>
-    <p:sldId id="265" r:id="rId26"/>
-    <p:sldId id="286" r:id="rId27"/>
-    <p:sldId id="282" r:id="rId28"/>
-    <p:sldId id="266" r:id="rId29"/>
-    <p:sldId id="283" r:id="rId30"/>
-    <p:sldId id="271" r:id="rId31"/>
-    <p:sldId id="270" r:id="rId32"/>
+    <p:sldId id="289" r:id="rId15"/>
+    <p:sldId id="277" r:id="rId16"/>
+    <p:sldId id="267" r:id="rId17"/>
+    <p:sldId id="278" r:id="rId18"/>
+    <p:sldId id="262" r:id="rId19"/>
+    <p:sldId id="269" r:id="rId20"/>
+    <p:sldId id="285" r:id="rId21"/>
+    <p:sldId id="279" r:id="rId22"/>
+    <p:sldId id="263" r:id="rId23"/>
+    <p:sldId id="280" r:id="rId24"/>
+    <p:sldId id="264" r:id="rId25"/>
+    <p:sldId id="281" r:id="rId26"/>
+    <p:sldId id="265" r:id="rId27"/>
+    <p:sldId id="286" r:id="rId28"/>
+    <p:sldId id="282" r:id="rId29"/>
+    <p:sldId id="266" r:id="rId30"/>
+    <p:sldId id="283" r:id="rId31"/>
+    <p:sldId id="271" r:id="rId32"/>
+    <p:sldId id="290" r:id="rId33"/>
+    <p:sldId id="270" r:id="rId34"/>
   </p:sldIdLst>
   <p:sldSz cx="12192000" cy="6858000"/>
   <p:notesSz cx="6858000" cy="9144000"/>
@@ -227,7 +229,7 @@
           <a:p>
             <a:fld id="{9CD5D8E4-A320-4C82-BF1E-497B145FD5B9}" type="datetimeFigureOut">
               <a:rPr lang="en-US" smtClean="0"/>
-              <a:t>3/18/2026</a:t>
+              <a:t>5/25/2026</a:t>
             </a:fld>
             <a:endParaRPr lang="en-US"/>
           </a:p>
@@ -583,7 +585,13 @@
   <p:cSld>
     <p:spTree>
       <p:nvGrpSpPr>
-        <p:cNvPr id="1" name=""/>
+        <p:cNvPr id="1" name="">
+          <a:extLst>
+            <a:ext uri="{FF2B5EF4-FFF2-40B4-BE49-F238E27FC236}">
+              <a16:creationId xmlns:a16="http://schemas.microsoft.com/office/drawing/2014/main" id="{EED3037D-F94E-58D2-DEBD-CF7270B503E2}"/>
+            </a:ext>
+          </a:extLst>
+        </p:cNvPr>
         <p:cNvGrpSpPr/>
         <p:nvPr/>
       </p:nvGrpSpPr>
@@ -597,7 +605,13 @@
       </p:grpSpPr>
       <p:sp>
         <p:nvSpPr>
-          <p:cNvPr id="2" name="Slide Image Placeholder 1"/>
+          <p:cNvPr id="2" name="Slide Image Placeholder 1">
+            <a:extLst>
+              <a:ext uri="{FF2B5EF4-FFF2-40B4-BE49-F238E27FC236}">
+                <a16:creationId xmlns:a16="http://schemas.microsoft.com/office/drawing/2014/main" id="{187CEA08-FA72-E286-E6C8-55DE9B025459}"/>
+              </a:ext>
+            </a:extLst>
+          </p:cNvPr>
           <p:cNvSpPr>
             <a:spLocks noGrp="1" noRot="1" noChangeAspect="1"/>
           </p:cNvSpPr>
@@ -609,7 +623,13 @@
       </p:sp>
       <p:sp>
         <p:nvSpPr>
-          <p:cNvPr id="3" name="Notes Placeholder 2"/>
+          <p:cNvPr id="3" name="Notes Placeholder 2">
+            <a:extLst>
+              <a:ext uri="{FF2B5EF4-FFF2-40B4-BE49-F238E27FC236}">
+                <a16:creationId xmlns:a16="http://schemas.microsoft.com/office/drawing/2014/main" id="{946E882D-0710-02AC-80AA-1BCA5BCB3566}"/>
+              </a:ext>
+            </a:extLst>
+          </p:cNvPr>
           <p:cNvSpPr>
             <a:spLocks noGrp="1"/>
           </p:cNvSpPr>
@@ -628,7 +648,13 @@
       </p:sp>
       <p:sp>
         <p:nvSpPr>
-          <p:cNvPr id="4" name="Slide Number Placeholder 3"/>
+          <p:cNvPr id="4" name="Slide Number Placeholder 3">
+            <a:extLst>
+              <a:ext uri="{FF2B5EF4-FFF2-40B4-BE49-F238E27FC236}">
+                <a16:creationId xmlns:a16="http://schemas.microsoft.com/office/drawing/2014/main" id="{D582C158-C0CD-95BF-BACF-00F90F49D151}"/>
+              </a:ext>
+            </a:extLst>
+          </p:cNvPr>
           <p:cNvSpPr>
             <a:spLocks noGrp="1"/>
           </p:cNvSpPr>
@@ -643,7 +669,7 @@
           <a:p>
             <a:fld id="{3D47B12C-7140-415A-B0C1-FFF42EF0303A}" type="slidenum">
               <a:rPr lang="en-US" smtClean="0"/>
-              <a:t>9</a:t>
+              <a:t>8</a:t>
             </a:fld>
             <a:endParaRPr lang="en-US"/>
           </a:p>
@@ -652,7 +678,7 @@
     </p:spTree>
     <p:extLst>
       <p:ext uri="{BB962C8B-B14F-4D97-AF65-F5344CB8AC3E}">
-        <p14:creationId xmlns:p14="http://schemas.microsoft.com/office/powerpoint/2010/main" val="2792595153"/>
+        <p14:creationId xmlns:p14="http://schemas.microsoft.com/office/powerpoint/2010/main" val="1951837474"/>
       </p:ext>
     </p:extLst>
   </p:cSld>
@@ -809,7 +835,7 @@
           <a:p>
             <a:fld id="{B1CD814F-3A2E-4FCD-B679-678770FA1B7D}" type="datetimeFigureOut">
               <a:rPr lang="en-US" smtClean="0"/>
-              <a:t>3/18/2026</a:t>
+              <a:t>5/25/2026</a:t>
             </a:fld>
             <a:endParaRPr lang="en-US"/>
           </a:p>
@@ -1007,7 +1033,7 @@
           <a:p>
             <a:fld id="{B1CD814F-3A2E-4FCD-B679-678770FA1B7D}" type="datetimeFigureOut">
               <a:rPr lang="en-US" smtClean="0"/>
-              <a:t>3/18/2026</a:t>
+              <a:t>5/25/2026</a:t>
             </a:fld>
             <a:endParaRPr lang="en-US"/>
           </a:p>
@@ -1215,7 +1241,7 @@
           <a:p>
             <a:fld id="{B1CD814F-3A2E-4FCD-B679-678770FA1B7D}" type="datetimeFigureOut">
               <a:rPr lang="en-US" smtClean="0"/>
-              <a:t>3/18/2026</a:t>
+              <a:t>5/25/2026</a:t>
             </a:fld>
             <a:endParaRPr lang="en-US"/>
           </a:p>
@@ -1413,7 +1439,7 @@
           <a:p>
             <a:fld id="{B1CD814F-3A2E-4FCD-B679-678770FA1B7D}" type="datetimeFigureOut">
               <a:rPr lang="en-US" smtClean="0"/>
-              <a:t>3/18/2026</a:t>
+              <a:t>5/25/2026</a:t>
             </a:fld>
             <a:endParaRPr lang="en-US"/>
           </a:p>
@@ -1688,7 +1714,7 @@
           <a:p>
             <a:fld id="{B1CD814F-3A2E-4FCD-B679-678770FA1B7D}" type="datetimeFigureOut">
               <a:rPr lang="en-US" smtClean="0"/>
-              <a:t>3/18/2026</a:t>
+              <a:t>5/25/2026</a:t>
             </a:fld>
             <a:endParaRPr lang="en-US"/>
           </a:p>
@@ -1953,7 +1979,7 @@
           <a:p>
             <a:fld id="{B1CD814F-3A2E-4FCD-B679-678770FA1B7D}" type="datetimeFigureOut">
               <a:rPr lang="en-US" smtClean="0"/>
-              <a:t>3/18/2026</a:t>
+              <a:t>5/25/2026</a:t>
             </a:fld>
             <a:endParaRPr lang="en-US"/>
           </a:p>
@@ -2365,7 +2391,7 @@
           <a:p>
             <a:fld id="{B1CD814F-3A2E-4FCD-B679-678770FA1B7D}" type="datetimeFigureOut">
               <a:rPr lang="en-US" smtClean="0"/>
-              <a:t>3/18/2026</a:t>
+              <a:t>5/25/2026</a:t>
             </a:fld>
             <a:endParaRPr lang="en-US"/>
           </a:p>
@@ -2506,7 +2532,7 @@
           <a:p>
             <a:fld id="{B1CD814F-3A2E-4FCD-B679-678770FA1B7D}" type="datetimeFigureOut">
               <a:rPr lang="en-US" smtClean="0"/>
-              <a:t>3/18/2026</a:t>
+              <a:t>5/25/2026</a:t>
             </a:fld>
             <a:endParaRPr lang="en-US"/>
           </a:p>
@@ -2619,7 +2645,7 @@
           <a:p>
             <a:fld id="{B1CD814F-3A2E-4FCD-B679-678770FA1B7D}" type="datetimeFigureOut">
               <a:rPr lang="en-US" smtClean="0"/>
-              <a:t>3/18/2026</a:t>
+              <a:t>5/25/2026</a:t>
             </a:fld>
             <a:endParaRPr lang="en-US"/>
           </a:p>
@@ -2930,7 +2956,7 @@
           <a:p>
             <a:fld id="{B1CD814F-3A2E-4FCD-B679-678770FA1B7D}" type="datetimeFigureOut">
               <a:rPr lang="en-US" smtClean="0"/>
-              <a:t>3/18/2026</a:t>
+              <a:t>5/25/2026</a:t>
             </a:fld>
             <a:endParaRPr lang="en-US"/>
           </a:p>
@@ -3218,7 +3244,7 @@
           <a:p>
             <a:fld id="{B1CD814F-3A2E-4FCD-B679-678770FA1B7D}" type="datetimeFigureOut">
               <a:rPr lang="en-US" smtClean="0"/>
-              <a:t>3/18/2026</a:t>
+              <a:t>5/25/2026</a:t>
             </a:fld>
             <a:endParaRPr lang="en-US"/>
           </a:p>
@@ -3459,7 +3485,7 @@
           <a:p>
             <a:fld id="{B1CD814F-3A2E-4FCD-B679-678770FA1B7D}" type="datetimeFigureOut">
               <a:rPr lang="en-US" smtClean="0"/>
-              <a:t>3/18/2026</a:t>
+              <a:t>5/25/2026</a:t>
             </a:fld>
             <a:endParaRPr lang="en-US"/>
           </a:p>
@@ -3961,7 +3987,7 @@
         <p:cNvPr id="1" name="">
           <a:extLst>
             <a:ext uri="{FF2B5EF4-FFF2-40B4-BE49-F238E27FC236}">
-              <a16:creationId xmlns:a16="http://schemas.microsoft.com/office/drawing/2014/main" id="{48D0B079-D69F-0795-1382-F10BD17D7F95}"/>
+              <a16:creationId xmlns:a16="http://schemas.microsoft.com/office/drawing/2014/main" id="{646C7353-2538-3D94-64E4-3480F295D5B9}"/>
             </a:ext>
           </a:extLst>
         </p:cNvPr>
@@ -3981,7 +4007,7 @@
           <p:cNvPr id="3" name="Subtitle 2">
             <a:extLst>
               <a:ext uri="{FF2B5EF4-FFF2-40B4-BE49-F238E27FC236}">
-                <a16:creationId xmlns:a16="http://schemas.microsoft.com/office/drawing/2014/main" id="{155A71B0-B782-8ADE-17B0-B576B10E79A6}"/>
+                <a16:creationId xmlns:a16="http://schemas.microsoft.com/office/drawing/2014/main" id="{63CEBC5D-5075-B35A-3806-9CC2FAD5F3D2}"/>
               </a:ext>
             </a:extLst>
           </p:cNvPr>
@@ -4000,7 +4026,7 @@
         </p:spPr>
         <p:txBody>
           <a:bodyPr>
-            <a:normAutofit fontScale="92500" lnSpcReduction="20000"/>
+            <a:normAutofit/>
           </a:bodyPr>
           <a:lstStyle/>
           <a:p>
@@ -4011,14 +4037,30 @@
             </a:r>
             <a:r>
               <a:rPr lang="en-US" sz="1800" b="1" dirty="0"/>
-              <a:t>:</a:t>
-            </a:r>
-          </a:p>
-          <a:p>
-            <a:pPr algn="l"/>
-            <a:r>
-              <a:rPr lang="en-US" sz="1600" dirty="0" err="1"/>
-              <a:t>set_message</a:t>
+              <a:t>: </a:t>
+            </a:r>
+            <a:r>
+              <a:rPr lang="en-US" sz="1600" b="1" dirty="0"/>
+              <a:t>(19 functions)</a:t>
+            </a:r>
+            <a:endParaRPr lang="en-US" sz="1600" dirty="0"/>
+          </a:p>
+          <a:p>
+            <a:pPr algn="l"/>
+            <a:r>
+              <a:rPr lang="en-US" sz="1600" dirty="0" err="1"/>
+              <a:t>set_service_name</a:t>
+            </a:r>
+            <a:r>
+              <a:rPr lang="en-US" sz="1600" dirty="0"/>
+              <a:t> – ✅</a:t>
+            </a:r>
+          </a:p>
+          <a:p>
+            <a:pPr algn="l"/>
+            <a:r>
+              <a:rPr lang="en-US" sz="1600" dirty="0" err="1"/>
+              <a:t>select_service_layer</a:t>
             </a:r>
             <a:r>
               <a:rPr lang="en-US" sz="1600" dirty="0"/>
@@ -4029,106 +4071,7 @@
             <a:pPr algn="l"/>
             <a:r>
               <a:rPr lang="en-US" sz="1600" dirty="0" err="1"/>
-              <a:t>get_order_by</a:t>
-            </a:r>
-            <a:r>
-              <a:rPr lang="en-US" sz="1600" dirty="0"/>
-              <a:t> – ✅</a:t>
-            </a:r>
-          </a:p>
-          <a:p>
-            <a:pPr algn="l"/>
-            <a:r>
-              <a:rPr lang="en-US" sz="1600" dirty="0" err="1"/>
-              <a:t>set_order_by</a:t>
-            </a:r>
-            <a:r>
-              <a:rPr lang="en-US" sz="1600" dirty="0"/>
-              <a:t> – ✅</a:t>
-            </a:r>
-          </a:p>
-          <a:p>
-            <a:pPr algn="l"/>
-            <a:r>
-              <a:rPr lang="en-US" sz="1600" dirty="0" err="1"/>
-              <a:t>set_order_by_all</a:t>
-            </a:r>
-            <a:r>
-              <a:rPr lang="en-US" sz="1600" dirty="0"/>
-              <a:t> – ✅</a:t>
-            </a:r>
-          </a:p>
-          <a:p>
-            <a:pPr algn="l"/>
-            <a:r>
-              <a:rPr lang="en-US" sz="1600" dirty="0" err="1"/>
-              <a:t>enable_descending_order</a:t>
-            </a:r>
-            <a:r>
-              <a:rPr lang="en-US" sz="1600" dirty="0"/>
-              <a:t> – ✅</a:t>
-            </a:r>
-          </a:p>
-          <a:p>
-            <a:pPr algn="l"/>
-            <a:r>
-              <a:rPr lang="en-US" sz="1600" dirty="0" err="1"/>
-              <a:t>disable_descending_order</a:t>
-            </a:r>
-            <a:r>
-              <a:rPr lang="en-US" sz="1600" dirty="0"/>
-              <a:t> – ✅</a:t>
-            </a:r>
-          </a:p>
-          <a:p>
-            <a:pPr algn="l"/>
-            <a:r>
-              <a:rPr lang="en-US" sz="1600" dirty="0" err="1"/>
-              <a:t>click_previous</a:t>
-            </a:r>
-            <a:r>
-              <a:rPr lang="en-US" sz="1600" dirty="0"/>
-              <a:t> – ✅</a:t>
-            </a:r>
-          </a:p>
-          <a:p>
-            <a:pPr algn="l"/>
-            <a:r>
-              <a:rPr lang="en-US" sz="1600" dirty="0" err="1"/>
-              <a:t>click_next</a:t>
-            </a:r>
-            <a:r>
-              <a:rPr lang="en-US" sz="1600" dirty="0"/>
-              <a:t> – ✅</a:t>
-            </a:r>
-          </a:p>
-          <a:p>
-            <a:pPr algn="l"/>
-            <a:r>
-              <a:rPr lang="en-US" sz="1600" dirty="0" err="1"/>
-              <a:t>open_events_alarms</a:t>
-            </a:r>
-            <a:r>
-              <a:rPr lang="en-US" sz="1600" dirty="0"/>
-              <a:t> – ✅</a:t>
-            </a:r>
-          </a:p>
-          <a:p>
-            <a:pPr algn="l"/>
-            <a:r>
-              <a:rPr lang="en-US" sz="1600" dirty="0" err="1"/>
-              <a:t>click_on_events_history</a:t>
-            </a:r>
-            <a:r>
-              <a:rPr lang="en-US" sz="1600" dirty="0"/>
-              <a:t> – ✅</a:t>
-            </a:r>
-          </a:p>
-          <a:p>
-            <a:pPr algn="l"/>
-            <a:r>
-              <a:rPr lang="en-US" sz="1600" dirty="0" err="1"/>
-              <a:t>click_on_alarms</a:t>
+              <a:t>set_all_service_layers</a:t>
             </a:r>
             <a:r>
               <a:rPr lang="en-US" sz="1600" dirty="0"/>
@@ -4139,7 +4082,7 @@
             <a:pPr algn="l"/>
             <a:r>
               <a:rPr lang="en-US" sz="1600" dirty="0" err="1"/>
-              <a:t>click_on_alarms_summary</a:t>
+              <a:t>get_all_selected_service_layers</a:t>
             </a:r>
             <a:r>
               <a:rPr lang="en-US" sz="1600" dirty="0"/>
@@ -4150,44 +4093,121 @@
             <a:pPr algn="l"/>
             <a:r>
               <a:rPr lang="en-US" sz="1600" dirty="0" err="1"/>
-              <a:t>get_all_events_history</a:t>
-            </a:r>
-            <a:r>
-              <a:rPr lang="en-US" sz="1600" dirty="0"/>
-              <a:t> -  </a:t>
-            </a:r>
-          </a:p>
-          <a:p>
-            <a:pPr algn="l"/>
-            <a:r>
-              <a:rPr lang="en-US" sz="1600" dirty="0" err="1"/>
-              <a:t>get_all_alarms</a:t>
-            </a:r>
-            <a:r>
-              <a:rPr lang="en-US" sz="1600" dirty="0"/>
-              <a:t> – </a:t>
-            </a:r>
-          </a:p>
-          <a:p>
-            <a:pPr algn="l"/>
-            <a:r>
-              <a:rPr lang="en-US" sz="1600" dirty="0" err="1"/>
-              <a:t>get_alarms_summary</a:t>
-            </a:r>
-            <a:r>
-              <a:rPr lang="en-US" sz="1600" dirty="0"/>
-              <a:t> - </a:t>
-            </a:r>
-          </a:p>
-          <a:p>
-            <a:pPr algn="l"/>
-            <a:r>
-              <a:rPr lang="en-US" sz="1600" dirty="0" err="1"/>
-              <a:t>close_events_alarms</a:t>
-            </a:r>
-            <a:r>
-              <a:rPr lang="en-US" sz="1600" dirty="0"/>
-              <a:t> – ✅</a:t>
+              <a:t>close_service_layer_dropdown</a:t>
+            </a:r>
+            <a:r>
+              <a:rPr lang="en-US" sz="1600" dirty="0"/>
+              <a:t> - ✅</a:t>
+            </a:r>
+          </a:p>
+          <a:p>
+            <a:pPr algn="l"/>
+            <a:r>
+              <a:rPr lang="en-US" sz="1600" dirty="0" err="1"/>
+              <a:t>remove_service_layer</a:t>
+            </a:r>
+            <a:r>
+              <a:rPr lang="en-US" sz="1600" dirty="0"/>
+              <a:t> - ✅</a:t>
+            </a:r>
+          </a:p>
+          <a:p>
+            <a:pPr algn="l"/>
+            <a:r>
+              <a:rPr lang="en-US" sz="1600" dirty="0" err="1"/>
+              <a:t>remove_all_service_layers</a:t>
+            </a:r>
+            <a:r>
+              <a:rPr lang="en-US" sz="1600" dirty="0"/>
+              <a:t> - ✅</a:t>
+            </a:r>
+          </a:p>
+          <a:p>
+            <a:pPr algn="l"/>
+            <a:r>
+              <a:rPr lang="en-US" sz="1600" dirty="0" err="1"/>
+              <a:t>select_protection_type</a:t>
+            </a:r>
+            <a:r>
+              <a:rPr lang="en-US" sz="1600" dirty="0"/>
+              <a:t> - ✅</a:t>
+            </a:r>
+          </a:p>
+          <a:p>
+            <a:pPr algn="l"/>
+            <a:r>
+              <a:rPr lang="en-US" sz="1600" dirty="0" err="1"/>
+              <a:t>set_all_protection_types</a:t>
+            </a:r>
+            <a:r>
+              <a:rPr lang="en-US" sz="1600" dirty="0"/>
+              <a:t> - ✅ </a:t>
+            </a:r>
+          </a:p>
+          <a:p>
+            <a:pPr algn="l"/>
+            <a:r>
+              <a:rPr lang="en-US" sz="1600" dirty="0" err="1"/>
+              <a:t>get_all_selected_protection_types</a:t>
+            </a:r>
+            <a:r>
+              <a:rPr lang="en-US" sz="1600" dirty="0"/>
+              <a:t> - ✅</a:t>
+            </a:r>
+          </a:p>
+          <a:p>
+            <a:pPr algn="l"/>
+            <a:r>
+              <a:rPr lang="en-US" sz="1600" dirty="0" err="1"/>
+              <a:t>close_protection_type_dropdown</a:t>
+            </a:r>
+            <a:r>
+              <a:rPr lang="en-US" sz="1600" dirty="0"/>
+              <a:t> - ✅</a:t>
+            </a:r>
+          </a:p>
+          <a:p>
+            <a:pPr algn="l"/>
+            <a:r>
+              <a:rPr lang="en-US" sz="1600" dirty="0" err="1"/>
+              <a:t>remove_protection_type</a:t>
+            </a:r>
+            <a:r>
+              <a:rPr lang="en-US" sz="1600" dirty="0"/>
+              <a:t> - ✅</a:t>
+            </a:r>
+          </a:p>
+          <a:p>
+            <a:pPr algn="l"/>
+            <a:r>
+              <a:rPr lang="en-US" sz="1600" dirty="0" err="1"/>
+              <a:t>remove_all_protection_types</a:t>
+            </a:r>
+            <a:r>
+              <a:rPr lang="en-US" sz="1600" dirty="0"/>
+              <a:t> - ✅</a:t>
+            </a:r>
+          </a:p>
+          <a:p>
+            <a:pPr algn="l"/>
+            <a:r>
+              <a:rPr lang="en-US" sz="1600" dirty="0" err="1"/>
+              <a:t>get_filter_by</a:t>
+            </a:r>
+            <a:r>
+              <a:rPr lang="en-US" sz="1600" dirty="0"/>
+              <a:t>  - ✅</a:t>
+            </a:r>
+          </a:p>
+          <a:p>
+            <a:pPr algn="l"/>
+            <a:r>
+              <a:rPr lang="en-US" sz="1600" dirty="0" err="1"/>
+              <a:t>set_filter_by</a:t>
+            </a:r>
+            <a:r>
+              <a:rPr lang="en-US" sz="1600" dirty="0"/>
+              <a:t> - ✅</a:t>
             </a:r>
           </a:p>
           <a:p>
@@ -4200,26 +4220,18 @@
           </a:p>
           <a:p>
             <a:pPr algn="l"/>
-            <a:endParaRPr lang="en-US" sz="1600" dirty="0"/>
-          </a:p>
-          <a:p>
-            <a:pPr algn="l"/>
-            <a:endParaRPr lang="en-US" sz="1600" dirty="0"/>
-          </a:p>
-          <a:p>
-            <a:pPr algn="l"/>
+            <a:r>
+              <a:rPr lang="en-US" sz="1600" dirty="0"/>
+              <a:t>More </a:t>
+            </a:r>
             <a:r>
               <a:rPr lang="en-US" sz="1600" dirty="0" err="1"/>
               <a:t>Fuctions</a:t>
             </a:r>
             <a:r>
               <a:rPr lang="en-US" sz="1600" dirty="0"/>
-              <a:t> on Events/Alarms table content…..</a:t>
-            </a:r>
-          </a:p>
-          <a:p>
-            <a:pPr algn="l"/>
-            <a:endParaRPr lang="en-US" sz="1600" dirty="0"/>
+              <a:t> …..</a:t>
+            </a:r>
           </a:p>
           <a:p>
             <a:pPr algn="l"/>
@@ -4242,7 +4254,7 @@
     </p:spTree>
     <p:extLst>
       <p:ext uri="{BB962C8B-B14F-4D97-AF65-F5344CB8AC3E}">
-        <p14:creationId xmlns:p14="http://schemas.microsoft.com/office/powerpoint/2010/main" val="38413639"/>
+        <p14:creationId xmlns:p14="http://schemas.microsoft.com/office/powerpoint/2010/main" val="246296374"/>
       </p:ext>
     </p:extLst>
   </p:cSld>
@@ -4260,7 +4272,7 @@
         <p:cNvPr id="1" name="">
           <a:extLst>
             <a:ext uri="{FF2B5EF4-FFF2-40B4-BE49-F238E27FC236}">
-              <a16:creationId xmlns:a16="http://schemas.microsoft.com/office/drawing/2014/main" id="{646C7353-2538-3D94-64E4-3480F295D5B9}"/>
+              <a16:creationId xmlns:a16="http://schemas.microsoft.com/office/drawing/2014/main" id="{AD5F5124-FFAC-F011-3072-C12D69974795}"/>
             </a:ext>
           </a:extLst>
         </p:cNvPr>
@@ -4280,7 +4292,7 @@
           <p:cNvPr id="3" name="Subtitle 2">
             <a:extLst>
               <a:ext uri="{FF2B5EF4-FFF2-40B4-BE49-F238E27FC236}">
-                <a16:creationId xmlns:a16="http://schemas.microsoft.com/office/drawing/2014/main" id="{63CEBC5D-5075-B35A-3806-9CC2FAD5F3D2}"/>
+                <a16:creationId xmlns:a16="http://schemas.microsoft.com/office/drawing/2014/main" id="{F487A533-30A1-9C86-17E0-827DEEB7E2E9}"/>
               </a:ext>
             </a:extLst>
           </p:cNvPr>
@@ -4310,7 +4322,11 @@
             </a:r>
             <a:r>
               <a:rPr lang="en-US" sz="1800" b="1" dirty="0"/>
-              <a:t>:</a:t>
+              <a:t>: </a:t>
+            </a:r>
+            <a:r>
+              <a:rPr lang="en-US" sz="1600" b="1" dirty="0"/>
+              <a:t>(19 functions)</a:t>
             </a:r>
             <a:endParaRPr lang="en-US" sz="1600" dirty="0"/>
           </a:p>
@@ -4318,7 +4334,7 @@
             <a:pPr algn="l"/>
             <a:r>
               <a:rPr lang="en-US" sz="1600" dirty="0" err="1"/>
-              <a:t>click_edit_columns</a:t>
+              <a:t>get_selected_domain_or_chassis</a:t>
             </a:r>
             <a:r>
               <a:rPr lang="en-US" sz="1600" dirty="0"/>
@@ -4329,18 +4345,7 @@
             <a:pPr algn="l"/>
             <a:r>
               <a:rPr lang="en-US" sz="1600" dirty="0" err="1"/>
-              <a:t>click_save_changes</a:t>
-            </a:r>
-            <a:r>
-              <a:rPr lang="en-US" sz="1600" dirty="0"/>
-              <a:t> – ✅</a:t>
-            </a:r>
-          </a:p>
-          <a:p>
-            <a:pPr algn="l"/>
-            <a:r>
-              <a:rPr lang="en-US" sz="1600" dirty="0" err="1"/>
-              <a:t>click_revert_changes</a:t>
+              <a:t>select_domain_or_chassis</a:t>
             </a:r>
             <a:r>
               <a:rPr lang="en-US" sz="1600" dirty="0"/>
@@ -4349,17 +4354,47 @@
           </a:p>
           <a:p>
             <a:pPr algn="l"/>
+            <a:r>
+              <a:rPr lang="en-US" sz="1600" dirty="0" err="1"/>
+              <a:t>click_previous</a:t>
+            </a:r>
+            <a:r>
+              <a:rPr lang="en-US" sz="1600" dirty="0"/>
+              <a:t> -</a:t>
+            </a:r>
+          </a:p>
+          <a:p>
+            <a:pPr algn="l"/>
+            <a:r>
+              <a:rPr lang="en-US" sz="1600" dirty="0" err="1"/>
+              <a:t>click_next</a:t>
+            </a:r>
+            <a:r>
+              <a:rPr lang="en-US" sz="1600" dirty="0"/>
+              <a:t> - </a:t>
+            </a:r>
+          </a:p>
+          <a:p>
+            <a:pPr algn="l"/>
             <a:endParaRPr lang="en-US" sz="1600" dirty="0"/>
           </a:p>
           <a:p>
             <a:pPr algn="l"/>
+            <a:endParaRPr lang="en-US" sz="1600" dirty="0"/>
+          </a:p>
+          <a:p>
+            <a:pPr algn="l"/>
+            <a:r>
+              <a:rPr lang="en-US" sz="1600" dirty="0"/>
+              <a:t>More </a:t>
+            </a:r>
             <a:r>
               <a:rPr lang="en-US" sz="1600" dirty="0" err="1"/>
               <a:t>Fuctions</a:t>
             </a:r>
             <a:r>
               <a:rPr lang="en-US" sz="1600" dirty="0"/>
-              <a:t> on the table content…..</a:t>
+              <a:t> …..</a:t>
             </a:r>
           </a:p>
           <a:p>
@@ -4385,7 +4420,7 @@
           <p:cNvPr id="4" name="TextBox 3">
             <a:extLst>
               <a:ext uri="{FF2B5EF4-FFF2-40B4-BE49-F238E27FC236}">
-                <a16:creationId xmlns:a16="http://schemas.microsoft.com/office/drawing/2014/main" id="{BB3DB260-E4C5-1F77-3774-75A0E6971505}"/>
+                <a16:creationId xmlns:a16="http://schemas.microsoft.com/office/drawing/2014/main" id="{1EB9FCDF-7262-E92F-9160-2C4C375A4606}"/>
               </a:ext>
             </a:extLst>
           </p:cNvPr>
@@ -4414,7 +4449,7 @@
                   <a:srgbClr val="FFFF00"/>
                 </a:highlight>
               </a:rPr>
-              <a:t>Summary: 80%</a:t>
+              <a:t>Summary: 89%</a:t>
             </a:r>
             <a:endParaRPr lang="en-US" sz="1200" b="1" dirty="0">
               <a:highlight>
@@ -4427,7 +4462,7 @@
     </p:spTree>
     <p:extLst>
       <p:ext uri="{BB962C8B-B14F-4D97-AF65-F5344CB8AC3E}">
-        <p14:creationId xmlns:p14="http://schemas.microsoft.com/office/powerpoint/2010/main" val="246296374"/>
+        <p14:creationId xmlns:p14="http://schemas.microsoft.com/office/powerpoint/2010/main" val="398093597"/>
       </p:ext>
     </p:extLst>
   </p:cSld>
@@ -4589,7 +4624,7 @@
             </a:r>
             <a:r>
               <a:rPr lang="en-US" sz="1800" b="1" dirty="0"/>
-              <a:t>:</a:t>
+              <a:t>: (28 functions)</a:t>
             </a:r>
           </a:p>
           <a:p>
@@ -4638,55 +4673,161 @@
           </a:p>
           <a:p>
             <a:pPr algn="l"/>
+            <a:r>
+              <a:rPr lang="en-US" sz="1600" dirty="0" err="1"/>
+              <a:t>set_ROADM_mode</a:t>
+            </a:r>
+            <a:r>
+              <a:rPr lang="en-US" sz="1600" dirty="0"/>
+              <a:t> - ✅</a:t>
+            </a:r>
+          </a:p>
+          <a:p>
+            <a:pPr algn="l"/>
+            <a:r>
+              <a:rPr lang="en-US" sz="1600" dirty="0" err="1"/>
+              <a:t>set_ROADM_protection</a:t>
+            </a:r>
+            <a:r>
+              <a:rPr lang="en-US" sz="1600" dirty="0"/>
+              <a:t> - ✅</a:t>
+            </a:r>
+          </a:p>
+          <a:p>
+            <a:pPr algn="l"/>
+            <a:r>
+              <a:rPr lang="en-US" sz="1600" dirty="0" err="1"/>
+              <a:t>set_ROADM_A_chassis</a:t>
+            </a:r>
+            <a:r>
+              <a:rPr lang="en-US" sz="1600" dirty="0"/>
+              <a:t> - ✅</a:t>
+            </a:r>
+          </a:p>
+          <a:p>
+            <a:pPr algn="l"/>
+            <a:r>
+              <a:rPr lang="en-US" sz="1600" dirty="0" err="1"/>
+              <a:t>set_ROADM_Z_chassis</a:t>
+            </a:r>
+            <a:r>
+              <a:rPr lang="en-US" sz="1600" dirty="0"/>
+              <a:t> - ✅</a:t>
+            </a:r>
+          </a:p>
+          <a:p>
+            <a:pPr algn="l"/>
+            <a:r>
+              <a:rPr lang="en-US" sz="1600" dirty="0" err="1"/>
+              <a:t>set_ROADM_provisioning_type</a:t>
+            </a:r>
+            <a:r>
+              <a:rPr lang="en-US" sz="1600" dirty="0"/>
+              <a:t> - ✅</a:t>
+            </a:r>
+          </a:p>
+          <a:p>
+            <a:pPr algn="l"/>
+            <a:r>
+              <a:rPr lang="en-US" sz="1600" dirty="0" err="1"/>
+              <a:t>set_ROADM_bandwidth</a:t>
+            </a:r>
+            <a:r>
+              <a:rPr lang="en-US" sz="1600" dirty="0"/>
+              <a:t> - ✅</a:t>
+            </a:r>
+          </a:p>
+          <a:p>
+            <a:pPr algn="l"/>
+            <a:r>
+              <a:rPr lang="en-US" sz="1600" dirty="0" err="1"/>
+              <a:t>set_ROADM_service_name</a:t>
+            </a:r>
+            <a:r>
+              <a:rPr lang="en-US" sz="1600" dirty="0"/>
+              <a:t> - ✅</a:t>
+            </a:r>
+          </a:p>
+          <a:p>
+            <a:pPr algn="l"/>
+            <a:r>
+              <a:rPr lang="en-US" sz="1600" dirty="0" err="1"/>
+              <a:t>enable_ROADM_path_restriction</a:t>
+            </a:r>
+            <a:r>
+              <a:rPr lang="en-US" sz="1600" dirty="0"/>
+              <a:t> - ✅</a:t>
+            </a:r>
+          </a:p>
+          <a:p>
+            <a:pPr algn="l"/>
+            <a:r>
+              <a:rPr lang="en-US" sz="1600" dirty="0" err="1"/>
+              <a:t>disable_ROADM_path_restriction</a:t>
+            </a:r>
+            <a:r>
+              <a:rPr lang="en-US" sz="1600" dirty="0"/>
+              <a:t> - ✅</a:t>
+            </a:r>
+          </a:p>
+          <a:p>
+            <a:pPr algn="l"/>
+            <a:r>
+              <a:rPr lang="en-US" sz="1600" dirty="0" err="1"/>
+              <a:t>ROADM_service_click_next</a:t>
+            </a:r>
+            <a:r>
+              <a:rPr lang="en-US" sz="1600" dirty="0"/>
+              <a:t> - ✅</a:t>
+            </a:r>
+          </a:p>
+          <a:p>
+            <a:pPr algn="l"/>
+            <a:r>
+              <a:rPr lang="en-US" sz="1600" dirty="0" err="1"/>
+              <a:t>ROADM_service_click_back</a:t>
+            </a:r>
+            <a:r>
+              <a:rPr lang="en-US" sz="1600" dirty="0"/>
+              <a:t> - ✅</a:t>
+            </a:r>
+          </a:p>
+          <a:p>
+            <a:pPr algn="l"/>
+            <a:r>
+              <a:rPr lang="en-US" sz="1600" dirty="0"/>
+              <a:t>set_ROADM_path1_A_device -</a:t>
+            </a:r>
+          </a:p>
+          <a:p>
+            <a:pPr algn="l"/>
+            <a:r>
+              <a:rPr lang="en-US" sz="1600" dirty="0"/>
+              <a:t>set_ROADM_path1_A_port -</a:t>
+            </a:r>
+          </a:p>
+          <a:p>
+            <a:pPr algn="l"/>
+            <a:r>
+              <a:rPr lang="en-US" sz="1600" dirty="0"/>
+              <a:t>set_ROADM_path1_Z_device -</a:t>
+            </a:r>
+          </a:p>
+          <a:p>
+            <a:pPr algn="l"/>
             <a:endParaRPr lang="en-US" sz="1600" dirty="0"/>
           </a:p>
           <a:p>
             <a:pPr algn="l"/>
             <a:endParaRPr lang="en-US" sz="1600" dirty="0"/>
           </a:p>
-        </p:txBody>
-      </p:sp>
-      <p:sp>
-        <p:nvSpPr>
-          <p:cNvPr id="4" name="TextBox 3">
-            <a:extLst>
-              <a:ext uri="{FF2B5EF4-FFF2-40B4-BE49-F238E27FC236}">
-                <a16:creationId xmlns:a16="http://schemas.microsoft.com/office/drawing/2014/main" id="{CC128BF2-8D6D-35E5-85E0-D8A5C98E87C4}"/>
-              </a:ext>
-            </a:extLst>
-          </p:cNvPr>
-          <p:cNvSpPr txBox="1"/>
-          <p:nvPr/>
-        </p:nvSpPr>
-        <p:spPr>
-          <a:xfrm>
-            <a:off x="9858568" y="199942"/>
-            <a:ext cx="1982724" cy="369332"/>
-          </a:xfrm>
-          <a:prstGeom prst="rect">
-            <a:avLst/>
-          </a:prstGeom>
-          <a:noFill/>
-        </p:spPr>
-        <p:txBody>
-          <a:bodyPr wrap="square" rtlCol="0">
-            <a:spAutoFit/>
-          </a:bodyPr>
-          <a:lstStyle/>
-          <a:p>
-            <a:r>
-              <a:rPr lang="en-US" b="1" dirty="0">
-                <a:highlight>
-                  <a:srgbClr val="00FF00"/>
-                </a:highlight>
-              </a:rPr>
-              <a:t>Summary: 100%</a:t>
-            </a:r>
-            <a:endParaRPr lang="en-US" sz="1200" b="1" dirty="0">
-              <a:highlight>
-                <a:srgbClr val="00FF00"/>
-              </a:highlight>
-            </a:endParaRPr>
+          <a:p>
+            <a:pPr algn="l"/>
+            <a:endParaRPr lang="en-US" sz="1600" dirty="0"/>
+          </a:p>
+          <a:p>
+            <a:pPr algn="l"/>
+            <a:endParaRPr lang="en-US" sz="1600" dirty="0"/>
           </a:p>
         </p:txBody>
       </p:sp>
@@ -4704,6 +4845,240 @@
 </file>
 
 <file path=ppt/slides/slide14.xml><?xml version="1.0" encoding="utf-8"?>
+<p:sld xmlns:a="http://schemas.openxmlformats.org/drawingml/2006/main" xmlns:r="http://schemas.openxmlformats.org/officeDocument/2006/relationships" xmlns:p="http://schemas.openxmlformats.org/presentationml/2006/main">
+  <p:cSld>
+    <p:spTree>
+      <p:nvGrpSpPr>
+        <p:cNvPr id="1" name="">
+          <a:extLst>
+            <a:ext uri="{FF2B5EF4-FFF2-40B4-BE49-F238E27FC236}">
+              <a16:creationId xmlns:a16="http://schemas.microsoft.com/office/drawing/2014/main" id="{DC2E5085-2AB8-1CDF-E65F-92B9B4A6E2E7}"/>
+            </a:ext>
+          </a:extLst>
+        </p:cNvPr>
+        <p:cNvGrpSpPr/>
+        <p:nvPr/>
+      </p:nvGrpSpPr>
+      <p:grpSpPr>
+        <a:xfrm>
+          <a:off x="0" y="0"/>
+          <a:ext cx="0" cy="0"/>
+          <a:chOff x="0" y="0"/>
+          <a:chExt cx="0" cy="0"/>
+        </a:xfrm>
+      </p:grpSpPr>
+      <p:sp>
+        <p:nvSpPr>
+          <p:cNvPr id="3" name="Subtitle 2">
+            <a:extLst>
+              <a:ext uri="{FF2B5EF4-FFF2-40B4-BE49-F238E27FC236}">
+                <a16:creationId xmlns:a16="http://schemas.microsoft.com/office/drawing/2014/main" id="{4084EA02-EE67-C1BC-0851-23ABB86D6E43}"/>
+              </a:ext>
+            </a:extLst>
+          </p:cNvPr>
+          <p:cNvSpPr>
+            <a:spLocks noGrp="1"/>
+          </p:cNvSpPr>
+          <p:nvPr>
+            <p:ph type="subTitle" idx="1"/>
+          </p:nvPr>
+        </p:nvSpPr>
+        <p:spPr>
+          <a:xfrm>
+            <a:off x="106680" y="99886"/>
+            <a:ext cx="11990832" cy="6666674"/>
+          </a:xfrm>
+        </p:spPr>
+        <p:txBody>
+          <a:bodyPr>
+            <a:normAutofit/>
+          </a:bodyPr>
+          <a:lstStyle/>
+          <a:p>
+            <a:pPr algn="l"/>
+            <a:r>
+              <a:rPr lang="en-US" sz="1800" b="1" dirty="0" err="1"/>
+              <a:t>service_provisioning</a:t>
+            </a:r>
+            <a:r>
+              <a:rPr lang="en-US" sz="1800" b="1" dirty="0"/>
+              <a:t>: (28 functions)</a:t>
+            </a:r>
+          </a:p>
+          <a:p>
+            <a:pPr algn="l"/>
+            <a:r>
+              <a:rPr lang="en-US" sz="1600" dirty="0"/>
+              <a:t>set_ROADM_path1_Z_port - </a:t>
+            </a:r>
+          </a:p>
+          <a:p>
+            <a:pPr algn="l"/>
+            <a:r>
+              <a:rPr lang="en-US" sz="1600" dirty="0" err="1"/>
+              <a:t>set_OTN_A_node</a:t>
+            </a:r>
+            <a:r>
+              <a:rPr lang="en-US" sz="1600" dirty="0"/>
+              <a:t> -</a:t>
+            </a:r>
+          </a:p>
+          <a:p>
+            <a:pPr algn="l"/>
+            <a:r>
+              <a:rPr lang="en-US" sz="1600" dirty="0" err="1"/>
+              <a:t>set_OTN_A_port</a:t>
+            </a:r>
+            <a:r>
+              <a:rPr lang="en-US" sz="1600" dirty="0"/>
+              <a:t> - </a:t>
+            </a:r>
+          </a:p>
+          <a:p>
+            <a:pPr algn="l"/>
+            <a:r>
+              <a:rPr lang="en-US" sz="1600" dirty="0" err="1"/>
+              <a:t>OTN_service_refresh</a:t>
+            </a:r>
+            <a:r>
+              <a:rPr lang="en-US" sz="1600" dirty="0"/>
+              <a:t> -</a:t>
+            </a:r>
+          </a:p>
+          <a:p>
+            <a:pPr algn="l"/>
+            <a:r>
+              <a:rPr lang="en-US" sz="1600" dirty="0" err="1"/>
+              <a:t>enable_OTN_protection</a:t>
+            </a:r>
+            <a:r>
+              <a:rPr lang="en-US" sz="1600" dirty="0"/>
+              <a:t> - ✅ </a:t>
+            </a:r>
+          </a:p>
+          <a:p>
+            <a:pPr algn="l"/>
+            <a:r>
+              <a:rPr lang="en-US" sz="1600" dirty="0" err="1"/>
+              <a:t>disable_OTN_protection</a:t>
+            </a:r>
+            <a:r>
+              <a:rPr lang="en-US" sz="1600" dirty="0"/>
+              <a:t> - ✅</a:t>
+            </a:r>
+          </a:p>
+          <a:p>
+            <a:pPr algn="l"/>
+            <a:r>
+              <a:rPr lang="en-US" sz="1600" dirty="0" err="1"/>
+              <a:t>set_OTN_service_type</a:t>
+            </a:r>
+            <a:r>
+              <a:rPr lang="en-US" sz="1600" dirty="0"/>
+              <a:t> -</a:t>
+            </a:r>
+          </a:p>
+          <a:p>
+            <a:pPr algn="l"/>
+            <a:r>
+              <a:rPr lang="en-US" sz="1600" dirty="0" err="1"/>
+              <a:t>enable_OTN_rate_limit</a:t>
+            </a:r>
+            <a:r>
+              <a:rPr lang="en-US" sz="1600" dirty="0"/>
+              <a:t> - ✅</a:t>
+            </a:r>
+          </a:p>
+          <a:p>
+            <a:pPr algn="l"/>
+            <a:r>
+              <a:rPr lang="en-US" sz="1600" dirty="0" err="1"/>
+              <a:t>set_OTN_limit_to</a:t>
+            </a:r>
+            <a:r>
+              <a:rPr lang="en-US" sz="1600" dirty="0"/>
+              <a:t> -</a:t>
+            </a:r>
+          </a:p>
+          <a:p>
+            <a:pPr algn="l"/>
+            <a:r>
+              <a:rPr lang="en-US" sz="1600" dirty="0" err="1"/>
+              <a:t>disable_OTN_rate_limit</a:t>
+            </a:r>
+            <a:r>
+              <a:rPr lang="en-US" sz="1600" dirty="0"/>
+              <a:t> - ✅</a:t>
+            </a:r>
+          </a:p>
+          <a:p>
+            <a:pPr algn="l"/>
+            <a:endParaRPr lang="en-US" sz="1600" dirty="0"/>
+          </a:p>
+          <a:p>
+            <a:pPr algn="l"/>
+            <a:endParaRPr lang="en-US" sz="1600" dirty="0"/>
+          </a:p>
+        </p:txBody>
+      </p:sp>
+      <p:sp>
+        <p:nvSpPr>
+          <p:cNvPr id="2" name="TextBox 1">
+            <a:extLst>
+              <a:ext uri="{FF2B5EF4-FFF2-40B4-BE49-F238E27FC236}">
+                <a16:creationId xmlns:a16="http://schemas.microsoft.com/office/drawing/2014/main" id="{2BF6C903-935D-114E-CAEA-48F38DD5332D}"/>
+              </a:ext>
+            </a:extLst>
+          </p:cNvPr>
+          <p:cNvSpPr txBox="1"/>
+          <p:nvPr/>
+        </p:nvSpPr>
+        <p:spPr>
+          <a:xfrm>
+            <a:off x="9858568" y="199942"/>
+            <a:ext cx="1982724" cy="369332"/>
+          </a:xfrm>
+          <a:prstGeom prst="rect">
+            <a:avLst/>
+          </a:prstGeom>
+          <a:noFill/>
+        </p:spPr>
+        <p:txBody>
+          <a:bodyPr wrap="square" rtlCol="0">
+            <a:spAutoFit/>
+          </a:bodyPr>
+          <a:lstStyle/>
+          <a:p>
+            <a:r>
+              <a:rPr lang="en-US" b="1" dirty="0">
+                <a:highlight>
+                  <a:srgbClr val="FFFF00"/>
+                </a:highlight>
+              </a:rPr>
+              <a:t>Summary: 67%</a:t>
+            </a:r>
+            <a:endParaRPr lang="en-US" sz="1200" b="1" dirty="0">
+              <a:highlight>
+                <a:srgbClr val="FFFF00"/>
+              </a:highlight>
+            </a:endParaRPr>
+          </a:p>
+        </p:txBody>
+      </p:sp>
+    </p:spTree>
+    <p:extLst>
+      <p:ext uri="{BB962C8B-B14F-4D97-AF65-F5344CB8AC3E}">
+        <p14:creationId xmlns:p14="http://schemas.microsoft.com/office/powerpoint/2010/main" val="2928389014"/>
+      </p:ext>
+    </p:extLst>
+  </p:cSld>
+  <p:clrMapOvr>
+    <a:masterClrMapping/>
+  </p:clrMapOvr>
+</p:sld>
+</file>
+
+<file path=ppt/slides/slide15.xml><?xml version="1.0" encoding="utf-8"?>
 <p:sld xmlns:a="http://schemas.openxmlformats.org/drawingml/2006/main" xmlns:r="http://schemas.openxmlformats.org/officeDocument/2006/relationships" xmlns:p="http://schemas.openxmlformats.org/presentationml/2006/main">
   <p:cSld>
     <p:spTree>
@@ -4796,7 +5171,7 @@
 </p:sld>
 </file>
 
-<file path=ppt/slides/slide15.xml><?xml version="1.0" encoding="utf-8"?>
+<file path=ppt/slides/slide16.xml><?xml version="1.0" encoding="utf-8"?>
 <p:sld xmlns:a="http://schemas.openxmlformats.org/drawingml/2006/main" xmlns:r="http://schemas.openxmlformats.org/officeDocument/2006/relationships" xmlns:p="http://schemas.openxmlformats.org/presentationml/2006/main">
   <p:cSld>
     <p:spTree>
@@ -4850,7 +5225,7 @@
             <a:pPr algn="l"/>
             <a:r>
               <a:rPr lang="en-US" sz="1800" b="1" dirty="0"/>
-              <a:t>performance:</a:t>
+              <a:t>performance: (0 functions)</a:t>
             </a:r>
           </a:p>
           <a:p>
@@ -4927,7 +5302,7 @@
 </p:sld>
 </file>
 
-<file path=ppt/slides/slide16.xml><?xml version="1.0" encoding="utf-8"?>
+<file path=ppt/slides/slide17.xml><?xml version="1.0" encoding="utf-8"?>
 <p:sld xmlns:a="http://schemas.openxmlformats.org/drawingml/2006/main" xmlns:r="http://schemas.openxmlformats.org/officeDocument/2006/relationships" xmlns:p="http://schemas.openxmlformats.org/presentationml/2006/main">
   <p:cSld>
     <p:spTree>
@@ -5021,7 +5396,7 @@
 </p:sld>
 </file>
 
-<file path=ppt/slides/slide17.xml><?xml version="1.0" encoding="utf-8"?>
+<file path=ppt/slides/slide18.xml><?xml version="1.0" encoding="utf-8"?>
 <p:sld xmlns:a="http://schemas.openxmlformats.org/drawingml/2006/main" xmlns:r="http://schemas.openxmlformats.org/officeDocument/2006/relationships" xmlns:p="http://schemas.openxmlformats.org/presentationml/2006/main">
   <p:cSld>
     <p:spTree>
@@ -5068,7 +5443,7 @@
         </p:spPr>
         <p:txBody>
           <a:bodyPr>
-            <a:normAutofit lnSpcReduction="10000"/>
+            <a:normAutofit/>
           </a:bodyPr>
           <a:lstStyle/>
           <a:p>
@@ -5079,7 +5454,7 @@
             </a:r>
             <a:r>
               <a:rPr lang="en-US" sz="1800" b="1" dirty="0"/>
-              <a:t>:</a:t>
+              <a:t>: (51 functions)</a:t>
             </a:r>
           </a:p>
           <a:p>
@@ -5112,153 +5487,153 @@
             </a:r>
             <a:r>
               <a:rPr lang="en-US" sz="1600" dirty="0"/>
-              <a:t> </a:t>
-            </a:r>
-            <a:r>
-              <a:rPr lang="en-US" sz="1600"/>
-              <a:t>- ✅</a:t>
-            </a:r>
+              <a:t> - ✅</a:t>
+            </a:r>
+          </a:p>
+          <a:p>
+            <a:pPr algn="l"/>
+            <a:r>
+              <a:rPr lang="en-US" sz="1600" dirty="0" err="1"/>
+              <a:t>click_start_discovery_for_IP_range</a:t>
+            </a:r>
+            <a:r>
+              <a:rPr lang="en-US" sz="1600" dirty="0"/>
+              <a:t> – ✅</a:t>
+            </a:r>
+          </a:p>
+          <a:p>
+            <a:pPr algn="l"/>
+            <a:r>
+              <a:rPr lang="en-US" sz="1600" dirty="0" err="1"/>
+              <a:t>click_stop_discovery_for_ip_range</a:t>
+            </a:r>
+            <a:r>
+              <a:rPr lang="en-US" sz="1600" dirty="0"/>
+              <a:t> - ✅</a:t>
+            </a:r>
+          </a:p>
+          <a:p>
+            <a:pPr algn="l"/>
+            <a:r>
+              <a:rPr lang="en-US" sz="1600" dirty="0" err="1"/>
+              <a:t>set_range_start_ip</a:t>
+            </a:r>
+            <a:r>
+              <a:rPr lang="en-US" sz="1600" dirty="0"/>
+              <a:t> – ✅</a:t>
+            </a:r>
+          </a:p>
+          <a:p>
+            <a:pPr algn="l"/>
+            <a:r>
+              <a:rPr lang="en-US" sz="1600" dirty="0" err="1"/>
+              <a:t>get_range_start_ip</a:t>
+            </a:r>
+            <a:r>
+              <a:rPr lang="en-US" sz="1600" dirty="0"/>
+              <a:t> – ✅</a:t>
+            </a:r>
+          </a:p>
+          <a:p>
+            <a:pPr algn="l"/>
+            <a:r>
+              <a:rPr lang="en-US" sz="1600" dirty="0" err="1"/>
+              <a:t>set_range_end_ip</a:t>
+            </a:r>
+            <a:r>
+              <a:rPr lang="en-US" sz="1600" dirty="0"/>
+              <a:t> – ✅</a:t>
+            </a:r>
+          </a:p>
+          <a:p>
+            <a:pPr algn="l"/>
+            <a:r>
+              <a:rPr lang="en-US" sz="1600" dirty="0" err="1"/>
+              <a:t>get_range_end_ip</a:t>
+            </a:r>
+            <a:r>
+              <a:rPr lang="en-US" sz="1600" dirty="0"/>
+              <a:t> – ✅</a:t>
+            </a:r>
+          </a:p>
+          <a:p>
+            <a:pPr algn="l"/>
+            <a:r>
+              <a:rPr lang="en-US" sz="1600" dirty="0" err="1"/>
+              <a:t>is_range_start_ip_field_valid</a:t>
+            </a:r>
+            <a:r>
+              <a:rPr lang="en-US" sz="1600" dirty="0"/>
+              <a:t> – ✅</a:t>
+            </a:r>
+          </a:p>
+          <a:p>
+            <a:pPr algn="l"/>
+            <a:r>
+              <a:rPr lang="en-US" sz="1600" dirty="0" err="1"/>
+              <a:t>is_range_end_ip_field_valid</a:t>
+            </a:r>
+            <a:r>
+              <a:rPr lang="en-US" sz="1600" dirty="0"/>
+              <a:t> – ✅</a:t>
+            </a:r>
+          </a:p>
+          <a:p>
+            <a:pPr algn="l"/>
+            <a:r>
+              <a:rPr lang="en-US" sz="1600" dirty="0" err="1"/>
+              <a:t>click_ICMP</a:t>
+            </a:r>
+            <a:r>
+              <a:rPr lang="en-US" sz="1600" dirty="0"/>
+              <a:t> – ✅</a:t>
+            </a:r>
+          </a:p>
+          <a:p>
+            <a:pPr algn="l"/>
+            <a:r>
+              <a:rPr lang="en-US" sz="1600" dirty="0"/>
+              <a:t>click_SNMPv2 – ✅</a:t>
+            </a:r>
+          </a:p>
+          <a:p>
+            <a:pPr algn="l"/>
+            <a:r>
+              <a:rPr lang="en-US" sz="1600" dirty="0"/>
+              <a:t>click_SNMPv3 - ✅</a:t>
+            </a:r>
+          </a:p>
+          <a:p>
+            <a:pPr algn="l"/>
+            <a:r>
+              <a:rPr lang="en-US" sz="1600" dirty="0"/>
+              <a:t>set_SNMPv2_read_community - ✅</a:t>
+            </a:r>
+          </a:p>
+          <a:p>
+            <a:pPr algn="l"/>
+            <a:r>
+              <a:rPr lang="en-US" sz="1600" dirty="0"/>
+              <a:t>get_SNMPv2_read_community - ✅</a:t>
+            </a:r>
+          </a:p>
+          <a:p>
+            <a:pPr algn="l"/>
+            <a:r>
+              <a:rPr lang="en-US" sz="1600" dirty="0"/>
+              <a:t>set_SNMPv2_write_community - ✅</a:t>
+            </a:r>
+          </a:p>
+          <a:p>
+            <a:pPr algn="l"/>
+            <a:r>
+              <a:rPr lang="en-US" sz="1600" dirty="0"/>
+              <a:t>get_SNMPv2_write_community - ✅</a:t>
+            </a:r>
+          </a:p>
+          <a:p>
+            <a:pPr algn="l"/>
             <a:endParaRPr lang="en-US" sz="1600" dirty="0"/>
-          </a:p>
-          <a:p>
-            <a:pPr algn="l"/>
-            <a:r>
-              <a:rPr lang="en-US" sz="1600" dirty="0" err="1"/>
-              <a:t>click_ICMP</a:t>
-            </a:r>
-            <a:r>
-              <a:rPr lang="en-US" sz="1600" dirty="0"/>
-              <a:t> – ✅</a:t>
-            </a:r>
-          </a:p>
-          <a:p>
-            <a:pPr algn="l"/>
-            <a:r>
-              <a:rPr lang="en-US" sz="1600" dirty="0"/>
-              <a:t>click_SNMPv2 – ✅</a:t>
-            </a:r>
-          </a:p>
-          <a:p>
-            <a:pPr algn="l"/>
-            <a:r>
-              <a:rPr lang="en-US" sz="1600" dirty="0"/>
-              <a:t>click_SNMPv3 - ✅</a:t>
-            </a:r>
-          </a:p>
-          <a:p>
-            <a:pPr algn="l"/>
-            <a:r>
-              <a:rPr lang="en-US" sz="1600" dirty="0" err="1"/>
-              <a:t>click_start_discovery_for_IP_range</a:t>
-            </a:r>
-            <a:r>
-              <a:rPr lang="en-US" sz="1600" dirty="0"/>
-              <a:t> – ✅</a:t>
-            </a:r>
-          </a:p>
-          <a:p>
-            <a:pPr algn="l"/>
-            <a:r>
-              <a:rPr lang="en-US" sz="1600" dirty="0" err="1"/>
-              <a:t>click_stop_discovery_for_ip_range</a:t>
-            </a:r>
-            <a:r>
-              <a:rPr lang="en-US" sz="1600" dirty="0"/>
-              <a:t> - ✅</a:t>
-            </a:r>
-          </a:p>
-          <a:p>
-            <a:pPr algn="l"/>
-            <a:r>
-              <a:rPr lang="en-US" sz="1600" dirty="0" err="1"/>
-              <a:t>set_start_IP_range</a:t>
-            </a:r>
-            <a:r>
-              <a:rPr lang="en-US" sz="1600" dirty="0"/>
-              <a:t> – ✅</a:t>
-            </a:r>
-          </a:p>
-          <a:p>
-            <a:pPr algn="l"/>
-            <a:r>
-              <a:rPr lang="en-US" sz="1600" dirty="0" err="1"/>
-              <a:t>get_start_IP_range</a:t>
-            </a:r>
-            <a:r>
-              <a:rPr lang="en-US" sz="1600" dirty="0"/>
-              <a:t> – ✅</a:t>
-            </a:r>
-          </a:p>
-          <a:p>
-            <a:pPr algn="l"/>
-            <a:r>
-              <a:rPr lang="en-US" sz="1600" dirty="0" err="1"/>
-              <a:t>set_end_IP_range</a:t>
-            </a:r>
-            <a:r>
-              <a:rPr lang="en-US" sz="1600" dirty="0"/>
-              <a:t> – ✅</a:t>
-            </a:r>
-          </a:p>
-          <a:p>
-            <a:pPr algn="l"/>
-            <a:r>
-              <a:rPr lang="en-US" sz="1600" dirty="0" err="1"/>
-              <a:t>get_end_IP_range</a:t>
-            </a:r>
-            <a:r>
-              <a:rPr lang="en-US" sz="1600" dirty="0"/>
-              <a:t> – ✅</a:t>
-            </a:r>
-          </a:p>
-          <a:p>
-            <a:pPr algn="l"/>
-            <a:r>
-              <a:rPr lang="en-US" sz="1600" dirty="0"/>
-              <a:t>ICMP??? </a:t>
-            </a:r>
-          </a:p>
-          <a:p>
-            <a:pPr algn="l"/>
-            <a:r>
-              <a:rPr lang="en-US" sz="1600" dirty="0"/>
-              <a:t>set_SNMPv2_read_community - ✅</a:t>
-            </a:r>
-          </a:p>
-          <a:p>
-            <a:pPr algn="l"/>
-            <a:r>
-              <a:rPr lang="en-US" sz="1600" dirty="0"/>
-              <a:t>get_SNMPv2_read_community - ✅</a:t>
-            </a:r>
-          </a:p>
-          <a:p>
-            <a:pPr algn="l"/>
-            <a:r>
-              <a:rPr lang="en-US" sz="1600" dirty="0"/>
-              <a:t>set_SNMPv2_write_community - ✅</a:t>
-            </a:r>
-          </a:p>
-          <a:p>
-            <a:pPr algn="l"/>
-            <a:r>
-              <a:rPr lang="en-US" sz="1600" dirty="0"/>
-              <a:t>get_SNMPv2_write_community - ✅</a:t>
-            </a:r>
-          </a:p>
-          <a:p>
-            <a:pPr algn="l"/>
-            <a:r>
-              <a:rPr lang="en-US" sz="1600" dirty="0"/>
-              <a:t>set_SNMPv2_admin_community - ✅</a:t>
-            </a:r>
-          </a:p>
-          <a:p>
-            <a:pPr algn="l"/>
-            <a:r>
-              <a:rPr lang="en-US" sz="1600" dirty="0"/>
-              <a:t>get_SNMPv2_admin_community - ✅</a:t>
-            </a:r>
           </a:p>
           <a:p>
             <a:pPr algn="l"/>
@@ -5279,7 +5654,7 @@
 </p:sld>
 </file>
 
-<file path=ppt/slides/slide18.xml><?xml version="1.0" encoding="utf-8"?>
+<file path=ppt/slides/slide19.xml><?xml version="1.0" encoding="utf-8"?>
 <p:sld xmlns:a="http://schemas.openxmlformats.org/drawingml/2006/main" xmlns:r="http://schemas.openxmlformats.org/officeDocument/2006/relationships" xmlns:p="http://schemas.openxmlformats.org/presentationml/2006/main">
   <p:cSld>
     <p:spTree>
@@ -5337,7 +5712,21 @@
             </a:r>
             <a:r>
               <a:rPr lang="en-US" sz="1800" b="1" dirty="0"/>
-              <a:t>:</a:t>
+              <a:t>: (51 functions)</a:t>
+            </a:r>
+          </a:p>
+          <a:p>
+            <a:pPr algn="l"/>
+            <a:r>
+              <a:rPr lang="en-US" sz="1600" dirty="0"/>
+              <a:t>set_SNMPv2_admin_community - ✅</a:t>
+            </a:r>
+          </a:p>
+          <a:p>
+            <a:pPr algn="l"/>
+            <a:r>
+              <a:rPr lang="en-US" sz="1600" dirty="0"/>
+              <a:t>get_SNMPv2_admin_community - ✅</a:t>
             </a:r>
           </a:p>
           <a:p>
@@ -5368,28 +5757,6 @@
           <a:p>
             <a:pPr algn="l"/>
             <a:r>
-              <a:rPr lang="en-US" sz="1600" dirty="0" err="1"/>
-              <a:t>set_performance_transport_protocol</a:t>
-            </a:r>
-            <a:r>
-              <a:rPr lang="en-US" sz="1600" dirty="0"/>
-              <a:t> - ✅</a:t>
-            </a:r>
-          </a:p>
-          <a:p>
-            <a:pPr algn="l"/>
-            <a:r>
-              <a:rPr lang="en-US" sz="1600" dirty="0" err="1"/>
-              <a:t>get_performance_transport_protocol</a:t>
-            </a:r>
-            <a:r>
-              <a:rPr lang="en-US" sz="1600" dirty="0"/>
-              <a:t> – ✅</a:t>
-            </a:r>
-          </a:p>
-          <a:p>
-            <a:pPr algn="l"/>
-            <a:r>
               <a:rPr lang="en-US" sz="1600" dirty="0"/>
               <a:t>set_SNMPv3_username – ✅</a:t>
             </a:r>
@@ -5419,6 +5786,20 @@
             <a:pPr algn="l"/>
             <a:r>
               <a:rPr lang="en-US" sz="1600" dirty="0"/>
+              <a:t>set_SNMPv3_contact_port – ✅ </a:t>
+            </a:r>
+          </a:p>
+          <a:p>
+            <a:pPr algn="l"/>
+            <a:r>
+              <a:rPr lang="en-US" sz="1600" dirty="0"/>
+              <a:t>get_SNMPv3_contact_port – ✅</a:t>
+            </a:r>
+          </a:p>
+          <a:p>
+            <a:pPr algn="l"/>
+            <a:r>
+              <a:rPr lang="en-US" sz="1600" dirty="0"/>
               <a:t>set_SNMPv3_authentication_protocol – ✅</a:t>
             </a:r>
           </a:p>
@@ -5462,13 +5843,6 @@
             <a:r>
               <a:rPr lang="en-US" sz="1600" dirty="0"/>
               <a:t>set_SNMPv3_privacy_password – ✅</a:t>
-            </a:r>
-          </a:p>
-          <a:p>
-            <a:pPr algn="l"/>
-            <a:r>
-              <a:rPr lang="en-US" sz="1600" dirty="0"/>
-              <a:t>get_SNMPv3_privacy_password - ✅ </a:t>
             </a:r>
           </a:p>
         </p:txBody>
@@ -5477,222 +5851,6 @@
     <p:extLst>
       <p:ext uri="{BB962C8B-B14F-4D97-AF65-F5344CB8AC3E}">
         <p14:creationId xmlns:p14="http://schemas.microsoft.com/office/powerpoint/2010/main" val="417983640"/>
-      </p:ext>
-    </p:extLst>
-  </p:cSld>
-  <p:clrMapOvr>
-    <a:masterClrMapping/>
-  </p:clrMapOvr>
-</p:sld>
-</file>
-
-<file path=ppt/slides/slide19.xml><?xml version="1.0" encoding="utf-8"?>
-<p:sld xmlns:a="http://schemas.openxmlformats.org/drawingml/2006/main" xmlns:r="http://schemas.openxmlformats.org/officeDocument/2006/relationships" xmlns:p="http://schemas.openxmlformats.org/presentationml/2006/main">
-  <p:cSld>
-    <p:spTree>
-      <p:nvGrpSpPr>
-        <p:cNvPr id="1" name="">
-          <a:extLst>
-            <a:ext uri="{FF2B5EF4-FFF2-40B4-BE49-F238E27FC236}">
-              <a16:creationId xmlns:a16="http://schemas.microsoft.com/office/drawing/2014/main" id="{A41E0A00-236B-F29C-BCBB-8C66723798A2}"/>
-            </a:ext>
-          </a:extLst>
-        </p:cNvPr>
-        <p:cNvGrpSpPr/>
-        <p:nvPr/>
-      </p:nvGrpSpPr>
-      <p:grpSpPr>
-        <a:xfrm>
-          <a:off x="0" y="0"/>
-          <a:ext cx="0" cy="0"/>
-          <a:chOff x="0" y="0"/>
-          <a:chExt cx="0" cy="0"/>
-        </a:xfrm>
-      </p:grpSpPr>
-      <p:sp>
-        <p:nvSpPr>
-          <p:cNvPr id="3" name="Subtitle 2">
-            <a:extLst>
-              <a:ext uri="{FF2B5EF4-FFF2-40B4-BE49-F238E27FC236}">
-                <a16:creationId xmlns:a16="http://schemas.microsoft.com/office/drawing/2014/main" id="{0E81F859-8B74-9346-6E3F-9BC02668C6B5}"/>
-              </a:ext>
-            </a:extLst>
-          </p:cNvPr>
-          <p:cNvSpPr>
-            <a:spLocks noGrp="1"/>
-          </p:cNvSpPr>
-          <p:nvPr>
-            <p:ph type="subTitle" idx="1"/>
-          </p:nvPr>
-        </p:nvSpPr>
-        <p:spPr>
-          <a:xfrm>
-            <a:off x="106680" y="99886"/>
-            <a:ext cx="11990832" cy="6666674"/>
-          </a:xfrm>
-        </p:spPr>
-        <p:txBody>
-          <a:bodyPr>
-            <a:normAutofit/>
-          </a:bodyPr>
-          <a:lstStyle/>
-          <a:p>
-            <a:pPr algn="l"/>
-            <a:r>
-              <a:rPr lang="en-US" sz="1800" b="1" dirty="0" err="1"/>
-              <a:t>device_discovery</a:t>
-            </a:r>
-            <a:r>
-              <a:rPr lang="en-US" sz="1800" b="1" dirty="0"/>
-              <a:t>:</a:t>
-            </a:r>
-          </a:p>
-          <a:p>
-            <a:pPr algn="l"/>
-            <a:r>
-              <a:rPr lang="en-US" sz="1800" dirty="0"/>
-              <a:t>set_SNMPv3_contact_port – ✅ </a:t>
-            </a:r>
-          </a:p>
-          <a:p>
-            <a:pPr algn="l"/>
-            <a:r>
-              <a:rPr lang="en-US" sz="1800" dirty="0"/>
-              <a:t>get_SNMPv3_contact_port – ✅</a:t>
-            </a:r>
-          </a:p>
-          <a:p>
-            <a:pPr algn="l"/>
-            <a:r>
-              <a:rPr lang="en-US" sz="1800" dirty="0" err="1"/>
-              <a:t>click_reset_to_default</a:t>
-            </a:r>
-            <a:r>
-              <a:rPr lang="en-US" sz="1800" dirty="0"/>
-              <a:t> – ✅</a:t>
-            </a:r>
-          </a:p>
-          <a:p>
-            <a:pPr algn="l"/>
-            <a:r>
-              <a:rPr lang="en-US" sz="1800" dirty="0" err="1"/>
-              <a:t>click_save_as_default</a:t>
-            </a:r>
-            <a:r>
-              <a:rPr lang="en-US" sz="1800" dirty="0"/>
-              <a:t> – ✅</a:t>
-            </a:r>
-          </a:p>
-          <a:p>
-            <a:pPr algn="l"/>
-            <a:r>
-              <a:rPr lang="en-US" sz="1800" dirty="0" err="1"/>
-              <a:t>confirm_default_override</a:t>
-            </a:r>
-            <a:r>
-              <a:rPr lang="en-US" sz="1800" dirty="0"/>
-              <a:t> - ✅</a:t>
-            </a:r>
-          </a:p>
-          <a:p>
-            <a:pPr algn="l"/>
-            <a:r>
-              <a:rPr lang="en-US" sz="1800" dirty="0" err="1"/>
-              <a:t>reject_default_override</a:t>
-            </a:r>
-            <a:r>
-              <a:rPr lang="en-US" sz="1800" dirty="0"/>
-              <a:t> - ✅</a:t>
-            </a:r>
-          </a:p>
-          <a:p>
-            <a:pPr algn="l"/>
-            <a:r>
-              <a:rPr lang="en-US" sz="1800" dirty="0" err="1"/>
-              <a:t>click_start_discovery</a:t>
-            </a:r>
-            <a:r>
-              <a:rPr lang="en-US" sz="1800" dirty="0"/>
-              <a:t> - ✅</a:t>
-            </a:r>
-            <a:endParaRPr lang="he-IL" sz="1800" dirty="0"/>
-          </a:p>
-          <a:p>
-            <a:pPr algn="l"/>
-            <a:r>
-              <a:rPr lang="en-US" sz="1800" dirty="0" err="1"/>
-              <a:t>is_start_discovery_btn_enabled</a:t>
-            </a:r>
-            <a:r>
-              <a:rPr lang="en-US" sz="1800" dirty="0"/>
-              <a:t> - ✅</a:t>
-            </a:r>
-          </a:p>
-          <a:p>
-            <a:pPr algn="l"/>
-            <a:r>
-              <a:rPr lang="en-US" sz="1800" dirty="0" err="1"/>
-              <a:t>close_device_discovery</a:t>
-            </a:r>
-            <a:r>
-              <a:rPr lang="en-US" sz="1800" dirty="0"/>
-              <a:t> - ✅</a:t>
-            </a:r>
-          </a:p>
-          <a:p>
-            <a:pPr algn="l"/>
-            <a:endParaRPr lang="en-US" sz="1800" b="1" dirty="0"/>
-          </a:p>
-        </p:txBody>
-      </p:sp>
-      <p:sp>
-        <p:nvSpPr>
-          <p:cNvPr id="4" name="TextBox 3">
-            <a:extLst>
-              <a:ext uri="{FF2B5EF4-FFF2-40B4-BE49-F238E27FC236}">
-                <a16:creationId xmlns:a16="http://schemas.microsoft.com/office/drawing/2014/main" id="{804D0AC7-5B97-6B06-6F5C-89570047182E}"/>
-              </a:ext>
-            </a:extLst>
-          </p:cNvPr>
-          <p:cNvSpPr txBox="1"/>
-          <p:nvPr/>
-        </p:nvSpPr>
-        <p:spPr>
-          <a:xfrm>
-            <a:off x="9858568" y="199942"/>
-            <a:ext cx="1982724" cy="369332"/>
-          </a:xfrm>
-          <a:prstGeom prst="rect">
-            <a:avLst/>
-          </a:prstGeom>
-          <a:noFill/>
-        </p:spPr>
-        <p:txBody>
-          <a:bodyPr wrap="square" rtlCol="0">
-            <a:spAutoFit/>
-          </a:bodyPr>
-          <a:lstStyle/>
-          <a:p>
-            <a:r>
-              <a:rPr lang="en-US" b="1" dirty="0">
-                <a:highlight>
-                  <a:srgbClr val="00FF00"/>
-                </a:highlight>
-              </a:rPr>
-              <a:t>Summary: 100%</a:t>
-            </a:r>
-            <a:endParaRPr lang="en-US" sz="1200" b="1" dirty="0">
-              <a:highlight>
-                <a:srgbClr val="00FF00"/>
-              </a:highlight>
-            </a:endParaRPr>
-          </a:p>
-        </p:txBody>
-      </p:sp>
-    </p:spTree>
-    <p:extLst>
-      <p:ext uri="{BB962C8B-B14F-4D97-AF65-F5344CB8AC3E}">
-        <p14:creationId xmlns:p14="http://schemas.microsoft.com/office/powerpoint/2010/main" val="2545360716"/>
       </p:ext>
     </p:extLst>
   </p:cSld>
@@ -5754,7 +5912,7 @@
             </a:r>
             <a:r>
               <a:rPr lang="en-US" sz="1800" b="1" dirty="0"/>
-              <a:t>:</a:t>
+              <a:t>: (6 functions)</a:t>
             </a:r>
           </a:p>
           <a:p>
@@ -5884,6 +6042,240 @@
 </file>
 
 <file path=ppt/slides/slide20.xml><?xml version="1.0" encoding="utf-8"?>
+<p:sld xmlns:a="http://schemas.openxmlformats.org/drawingml/2006/main" xmlns:r="http://schemas.openxmlformats.org/officeDocument/2006/relationships" xmlns:p="http://schemas.openxmlformats.org/presentationml/2006/main">
+  <p:cSld>
+    <p:spTree>
+      <p:nvGrpSpPr>
+        <p:cNvPr id="1" name="">
+          <a:extLst>
+            <a:ext uri="{FF2B5EF4-FFF2-40B4-BE49-F238E27FC236}">
+              <a16:creationId xmlns:a16="http://schemas.microsoft.com/office/drawing/2014/main" id="{A41E0A00-236B-F29C-BCBB-8C66723798A2}"/>
+            </a:ext>
+          </a:extLst>
+        </p:cNvPr>
+        <p:cNvGrpSpPr/>
+        <p:nvPr/>
+      </p:nvGrpSpPr>
+      <p:grpSpPr>
+        <a:xfrm>
+          <a:off x="0" y="0"/>
+          <a:ext cx="0" cy="0"/>
+          <a:chOff x="0" y="0"/>
+          <a:chExt cx="0" cy="0"/>
+        </a:xfrm>
+      </p:grpSpPr>
+      <p:sp>
+        <p:nvSpPr>
+          <p:cNvPr id="3" name="Subtitle 2">
+            <a:extLst>
+              <a:ext uri="{FF2B5EF4-FFF2-40B4-BE49-F238E27FC236}">
+                <a16:creationId xmlns:a16="http://schemas.microsoft.com/office/drawing/2014/main" id="{0E81F859-8B74-9346-6E3F-9BC02668C6B5}"/>
+              </a:ext>
+            </a:extLst>
+          </p:cNvPr>
+          <p:cNvSpPr>
+            <a:spLocks noGrp="1"/>
+          </p:cNvSpPr>
+          <p:nvPr>
+            <p:ph type="subTitle" idx="1"/>
+          </p:nvPr>
+        </p:nvSpPr>
+        <p:spPr>
+          <a:xfrm>
+            <a:off x="106680" y="99886"/>
+            <a:ext cx="11990832" cy="6666674"/>
+          </a:xfrm>
+        </p:spPr>
+        <p:txBody>
+          <a:bodyPr>
+            <a:normAutofit/>
+          </a:bodyPr>
+          <a:lstStyle/>
+          <a:p>
+            <a:pPr algn="l"/>
+            <a:r>
+              <a:rPr lang="en-US" sz="1800" b="1" dirty="0" err="1"/>
+              <a:t>device_discovery</a:t>
+            </a:r>
+            <a:r>
+              <a:rPr lang="en-US" sz="1800" b="1" dirty="0"/>
+              <a:t>: (51 functions)</a:t>
+            </a:r>
+          </a:p>
+          <a:p>
+            <a:pPr algn="l"/>
+            <a:r>
+              <a:rPr lang="en-US" sz="1800" dirty="0"/>
+              <a:t>get_SNMPv3_privacy_password - ✅ </a:t>
+            </a:r>
+          </a:p>
+          <a:p>
+            <a:pPr algn="l"/>
+            <a:r>
+              <a:rPr lang="en-US" sz="1800" dirty="0"/>
+              <a:t>configure_SNMPv3_entire_process - ✅</a:t>
+            </a:r>
+          </a:p>
+          <a:p>
+            <a:pPr algn="l"/>
+            <a:r>
+              <a:rPr lang="en-US" sz="1800" dirty="0" err="1"/>
+              <a:t>set_performance_transport_protocol</a:t>
+            </a:r>
+            <a:r>
+              <a:rPr lang="en-US" sz="1800" dirty="0"/>
+              <a:t> - ✅</a:t>
+            </a:r>
+          </a:p>
+          <a:p>
+            <a:pPr algn="l"/>
+            <a:r>
+              <a:rPr lang="en-US" sz="1800" dirty="0" err="1"/>
+              <a:t>get_performance_transport_protocol</a:t>
+            </a:r>
+            <a:r>
+              <a:rPr lang="en-US" sz="1800" dirty="0"/>
+              <a:t> – ✅</a:t>
+            </a:r>
+          </a:p>
+          <a:p>
+            <a:pPr algn="l"/>
+            <a:r>
+              <a:rPr lang="en-US" sz="1800" dirty="0" err="1"/>
+              <a:t>click_reset_to_default</a:t>
+            </a:r>
+            <a:r>
+              <a:rPr lang="en-US" sz="1800" dirty="0"/>
+              <a:t> – ✅</a:t>
+            </a:r>
+          </a:p>
+          <a:p>
+            <a:pPr algn="l"/>
+            <a:r>
+              <a:rPr lang="en-US" sz="1800" dirty="0" err="1"/>
+              <a:t>click_save_as_default</a:t>
+            </a:r>
+            <a:r>
+              <a:rPr lang="en-US" sz="1800" dirty="0"/>
+              <a:t> – ✅</a:t>
+            </a:r>
+          </a:p>
+          <a:p>
+            <a:pPr algn="l"/>
+            <a:r>
+              <a:rPr lang="en-US" sz="1800" dirty="0" err="1"/>
+              <a:t>confirm_default_override</a:t>
+            </a:r>
+            <a:r>
+              <a:rPr lang="en-US" sz="1800" dirty="0"/>
+              <a:t> - ✅</a:t>
+            </a:r>
+          </a:p>
+          <a:p>
+            <a:pPr algn="l"/>
+            <a:r>
+              <a:rPr lang="en-US" sz="1800" dirty="0" err="1"/>
+              <a:t>reject_default_override</a:t>
+            </a:r>
+            <a:r>
+              <a:rPr lang="en-US" sz="1800" dirty="0"/>
+              <a:t> - ✅</a:t>
+            </a:r>
+          </a:p>
+          <a:p>
+            <a:pPr algn="l"/>
+            <a:r>
+              <a:rPr lang="en-US" sz="1800" dirty="0" err="1"/>
+              <a:t>click_start_discovery</a:t>
+            </a:r>
+            <a:r>
+              <a:rPr lang="en-US" sz="1800" dirty="0"/>
+              <a:t> - ✅</a:t>
+            </a:r>
+            <a:endParaRPr lang="he-IL" sz="1800" dirty="0"/>
+          </a:p>
+          <a:p>
+            <a:pPr algn="l"/>
+            <a:r>
+              <a:rPr lang="en-US" sz="1800" dirty="0" err="1"/>
+              <a:t>is_start_discovery_btn_enabled</a:t>
+            </a:r>
+            <a:r>
+              <a:rPr lang="en-US" sz="1800" dirty="0"/>
+              <a:t> - ✅</a:t>
+            </a:r>
+          </a:p>
+          <a:p>
+            <a:pPr algn="l"/>
+            <a:r>
+              <a:rPr lang="en-US" sz="1800" dirty="0" err="1"/>
+              <a:t>close_device_discovery</a:t>
+            </a:r>
+            <a:r>
+              <a:rPr lang="en-US" sz="1800" dirty="0"/>
+              <a:t> - ✅</a:t>
+            </a:r>
+          </a:p>
+        </p:txBody>
+      </p:sp>
+      <p:sp>
+        <p:nvSpPr>
+          <p:cNvPr id="4" name="TextBox 3">
+            <a:extLst>
+              <a:ext uri="{FF2B5EF4-FFF2-40B4-BE49-F238E27FC236}">
+                <a16:creationId xmlns:a16="http://schemas.microsoft.com/office/drawing/2014/main" id="{804D0AC7-5B97-6B06-6F5C-89570047182E}"/>
+              </a:ext>
+            </a:extLst>
+          </p:cNvPr>
+          <p:cNvSpPr txBox="1"/>
+          <p:nvPr/>
+        </p:nvSpPr>
+        <p:spPr>
+          <a:xfrm>
+            <a:off x="9858568" y="199942"/>
+            <a:ext cx="1982724" cy="369332"/>
+          </a:xfrm>
+          <a:prstGeom prst="rect">
+            <a:avLst/>
+          </a:prstGeom>
+          <a:noFill/>
+        </p:spPr>
+        <p:txBody>
+          <a:bodyPr wrap="square" rtlCol="0">
+            <a:spAutoFit/>
+          </a:bodyPr>
+          <a:lstStyle/>
+          <a:p>
+            <a:r>
+              <a:rPr lang="en-US" b="1" dirty="0">
+                <a:highlight>
+                  <a:srgbClr val="00FF00"/>
+                </a:highlight>
+              </a:rPr>
+              <a:t>Summary: 100%</a:t>
+            </a:r>
+            <a:endParaRPr lang="en-US" sz="1200" b="1" dirty="0">
+              <a:highlight>
+                <a:srgbClr val="00FF00"/>
+              </a:highlight>
+            </a:endParaRPr>
+          </a:p>
+        </p:txBody>
+      </p:sp>
+    </p:spTree>
+    <p:extLst>
+      <p:ext uri="{BB962C8B-B14F-4D97-AF65-F5344CB8AC3E}">
+        <p14:creationId xmlns:p14="http://schemas.microsoft.com/office/powerpoint/2010/main" val="2545360716"/>
+      </p:ext>
+    </p:extLst>
+  </p:cSld>
+  <p:clrMapOvr>
+    <a:masterClrMapping/>
+  </p:clrMapOvr>
+</p:sld>
+</file>
+
+<file path=ppt/slides/slide21.xml><?xml version="1.0" encoding="utf-8"?>
 <p:sld xmlns:a="http://schemas.openxmlformats.org/drawingml/2006/main" xmlns:r="http://schemas.openxmlformats.org/officeDocument/2006/relationships" xmlns:p="http://schemas.openxmlformats.org/presentationml/2006/main">
   <p:cSld>
     <p:spTree>
@@ -5977,7 +6369,7 @@
 </p:sld>
 </file>
 
-<file path=ppt/slides/slide21.xml><?xml version="1.0" encoding="utf-8"?>
+<file path=ppt/slides/slide22.xml><?xml version="1.0" encoding="utf-8"?>
 <p:sld xmlns:a="http://schemas.openxmlformats.org/drawingml/2006/main" xmlns:r="http://schemas.openxmlformats.org/officeDocument/2006/relationships" xmlns:p="http://schemas.openxmlformats.org/presentationml/2006/main">
   <p:cSld>
     <p:spTree>
@@ -6035,7 +6427,7 @@
             </a:r>
             <a:r>
               <a:rPr lang="en-US" sz="1800" b="1" dirty="0"/>
-              <a:t>:</a:t>
+              <a:t>: (12 functions)</a:t>
             </a:r>
           </a:p>
           <a:p>
@@ -6064,66 +6456,44 @@
             <a:pPr algn="l"/>
             <a:r>
               <a:rPr lang="en-US" sz="1600" dirty="0" err="1"/>
-              <a:t>click_remove_domain_btn</a:t>
+              <a:t>remove_domain</a:t>
+            </a:r>
+            <a:r>
+              <a:rPr lang="en-US" sz="1600" dirty="0"/>
+              <a:t> – ✅</a:t>
+            </a:r>
+          </a:p>
+          <a:p>
+            <a:pPr algn="l"/>
+            <a:r>
+              <a:rPr lang="en-US" sz="1600" dirty="0" err="1"/>
+              <a:t>remove_chassis</a:t>
+            </a:r>
+            <a:r>
+              <a:rPr lang="en-US" sz="1600" dirty="0"/>
+              <a:t> – ✅</a:t>
+            </a:r>
+          </a:p>
+          <a:p>
+            <a:pPr algn="l"/>
+            <a:r>
+              <a:rPr lang="en-US" sz="1600" dirty="0" err="1"/>
+              <a:t>remove_device</a:t>
+            </a:r>
+            <a:r>
+              <a:rPr lang="en-US" sz="1600" dirty="0"/>
+              <a:t> – ✅</a:t>
+            </a:r>
+          </a:p>
+          <a:p>
+            <a:pPr algn="l"/>
+            <a:r>
+              <a:rPr lang="en-US" sz="1600" dirty="0" err="1"/>
+              <a:t>verify_element_deleted</a:t>
             </a:r>
             <a:r>
               <a:rPr lang="en-US" sz="1600" dirty="0"/>
               <a:t> - ✅</a:t>
-            </a:r>
-          </a:p>
-          <a:p>
-            <a:pPr algn="l"/>
-            <a:r>
-              <a:rPr lang="en-US" sz="1600" dirty="0" err="1"/>
-              <a:t>remove_domain</a:t>
-            </a:r>
-            <a:r>
-              <a:rPr lang="en-US" sz="1600" dirty="0"/>
-              <a:t> – ✅</a:t>
-            </a:r>
-          </a:p>
-          <a:p>
-            <a:pPr algn="l"/>
-            <a:r>
-              <a:rPr lang="en-US" sz="1600" dirty="0" err="1"/>
-              <a:t>click_remove_chassis_btn</a:t>
-            </a:r>
-            <a:r>
-              <a:rPr lang="en-US" sz="1600" dirty="0"/>
-              <a:t> - ✅</a:t>
-            </a:r>
-          </a:p>
-          <a:p>
-            <a:pPr algn="l"/>
-            <a:r>
-              <a:rPr lang="en-US" sz="1600" dirty="0" err="1"/>
-              <a:t>remove_chassis</a:t>
-            </a:r>
-            <a:r>
-              <a:rPr lang="en-US" sz="1600" dirty="0"/>
-              <a:t> – ✅</a:t>
-            </a:r>
-          </a:p>
-          <a:p>
-            <a:pPr algn="l"/>
-            <a:r>
-              <a:rPr lang="en-US" sz="1600" dirty="0" err="1"/>
-              <a:t>click_remove_device_btn</a:t>
-            </a:r>
-            <a:r>
-              <a:rPr lang="en-US" sz="1600" dirty="0"/>
-              <a:t> - ✅</a:t>
-            </a:r>
-          </a:p>
-          <a:p>
-            <a:pPr algn="l"/>
-            <a:r>
-              <a:rPr lang="en-US" sz="1600" dirty="0" err="1"/>
-              <a:t>remove_device</a:t>
-            </a:r>
-            <a:r>
-              <a:rPr lang="en-US" sz="1600" dirty="0"/>
-              <a:t> – ✅</a:t>
             </a:r>
           </a:p>
           <a:p>
@@ -6259,7 +6629,7 @@
 </p:sld>
 </file>
 
-<file path=ppt/slides/slide22.xml><?xml version="1.0" encoding="utf-8"?>
+<file path=ppt/slides/slide23.xml><?xml version="1.0" encoding="utf-8"?>
 <p:sld xmlns:a="http://schemas.openxmlformats.org/drawingml/2006/main" xmlns:r="http://schemas.openxmlformats.org/officeDocument/2006/relationships" xmlns:p="http://schemas.openxmlformats.org/presentationml/2006/main">
   <p:cSld>
     <p:spTree>
@@ -6352,7 +6722,7 @@
 </p:sld>
 </file>
 
-<file path=ppt/slides/slide23.xml><?xml version="1.0" encoding="utf-8"?>
+<file path=ppt/slides/slide24.xml><?xml version="1.0" encoding="utf-8"?>
 <p:sld xmlns:a="http://schemas.openxmlformats.org/drawingml/2006/main" xmlns:r="http://schemas.openxmlformats.org/officeDocument/2006/relationships" xmlns:p="http://schemas.openxmlformats.org/presentationml/2006/main">
   <p:cSld>
     <p:spTree>
@@ -6406,7 +6776,7 @@
             <a:pPr algn="l"/>
             <a:r>
               <a:rPr lang="en-US" sz="1800" b="1" dirty="0"/>
-              <a:t>inventory:</a:t>
+              <a:t>inventory: (0 functions)</a:t>
             </a:r>
           </a:p>
           <a:p>
@@ -6483,7 +6853,7 @@
 </p:sld>
 </file>
 
-<file path=ppt/slides/slide24.xml><?xml version="1.0" encoding="utf-8"?>
+<file path=ppt/slides/slide25.xml><?xml version="1.0" encoding="utf-8"?>
 <p:sld xmlns:a="http://schemas.openxmlformats.org/drawingml/2006/main" xmlns:r="http://schemas.openxmlformats.org/officeDocument/2006/relationships" xmlns:p="http://schemas.openxmlformats.org/presentationml/2006/main">
   <p:cSld>
     <p:spTree>
@@ -6576,7 +6946,7 @@
 </p:sld>
 </file>
 
-<file path=ppt/slides/slide25.xml><?xml version="1.0" encoding="utf-8"?>
+<file path=ppt/slides/slide26.xml><?xml version="1.0" encoding="utf-8"?>
 <p:sld xmlns:a="http://schemas.openxmlformats.org/drawingml/2006/main" xmlns:r="http://schemas.openxmlformats.org/officeDocument/2006/relationships" xmlns:p="http://schemas.openxmlformats.org/presentationml/2006/main">
   <p:cSld>
     <p:spTree>
@@ -6623,7 +6993,7 @@
         </p:spPr>
         <p:txBody>
           <a:bodyPr>
-            <a:normAutofit/>
+            <a:normAutofit lnSpcReduction="10000"/>
           </a:bodyPr>
           <a:lstStyle/>
           <a:p>
@@ -6634,7 +7004,7 @@
             </a:r>
             <a:r>
               <a:rPr lang="en-US" sz="1800" b="1" dirty="0"/>
-              <a:t>:</a:t>
+              <a:t>: (44 functions)</a:t>
             </a:r>
           </a:p>
           <a:p>
@@ -6778,6 +7148,17 @@
             <a:r>
               <a:rPr lang="en-US" sz="1600" dirty="0"/>
               <a:t>(when Filter by is on Devices) – ✅</a:t>
+            </a:r>
+          </a:p>
+          <a:p>
+            <a:pPr algn="l"/>
+            <a:r>
+              <a:rPr lang="en-US" sz="1600" dirty="0" err="1"/>
+              <a:t>close_devices_dropdown</a:t>
+            </a:r>
+            <a:r>
+              <a:rPr lang="en-US" sz="1600" dirty="0"/>
+              <a:t> - ✅</a:t>
             </a:r>
           </a:p>
           <a:p>
@@ -6866,7 +7247,7 @@
 </p:sld>
 </file>
 
-<file path=ppt/slides/slide26.xml><?xml version="1.0" encoding="utf-8"?>
+<file path=ppt/slides/slide27.xml><?xml version="1.0" encoding="utf-8"?>
 <p:sld xmlns:a="http://schemas.openxmlformats.org/drawingml/2006/main" xmlns:r="http://schemas.openxmlformats.org/officeDocument/2006/relationships" xmlns:p="http://schemas.openxmlformats.org/presentationml/2006/main">
   <p:cSld>
     <p:spTree>
@@ -6924,7 +7305,7 @@
             </a:r>
             <a:r>
               <a:rPr lang="en-US" sz="1800" b="1" dirty="0"/>
-              <a:t>:</a:t>
+              <a:t>: (44 functions)</a:t>
             </a:r>
           </a:p>
           <a:p>
@@ -6934,10 +7315,9 @@
               <a:t>select_devices_type_filterBy_device_type</a:t>
             </a:r>
             <a:r>
-              <a:rPr lang="en-US" sz="1600"/>
+              <a:rPr lang="en-US" sz="1600" dirty="0"/>
               <a:t> - ✅</a:t>
             </a:r>
-            <a:endParaRPr lang="en-US" sz="1600" dirty="0"/>
           </a:p>
           <a:p>
             <a:pPr algn="l"/>
@@ -7054,6 +7434,28 @@
             <a:r>
               <a:rPr lang="en-US" sz="1600" dirty="0" err="1"/>
               <a:t>clear_alert</a:t>
+            </a:r>
+            <a:r>
+              <a:rPr lang="en-US" sz="1600" dirty="0"/>
+              <a:t> - ✅</a:t>
+            </a:r>
+          </a:p>
+          <a:p>
+            <a:pPr algn="l"/>
+            <a:r>
+              <a:rPr lang="en-US" sz="1600" dirty="0" err="1"/>
+              <a:t>hide_event</a:t>
+            </a:r>
+            <a:r>
+              <a:rPr lang="en-US" sz="1600" dirty="0"/>
+              <a:t> - ✅</a:t>
+            </a:r>
+          </a:p>
+          <a:p>
+            <a:pPr algn="l"/>
+            <a:r>
+              <a:rPr lang="en-US" sz="1600" dirty="0" err="1"/>
+              <a:t>show_hidden_events</a:t>
             </a:r>
             <a:r>
               <a:rPr lang="en-US" sz="1600" dirty="0"/>
@@ -7161,7 +7563,7 @@
 </p:sld>
 </file>
 
-<file path=ppt/slides/slide27.xml><?xml version="1.0" encoding="utf-8"?>
+<file path=ppt/slides/slide28.xml><?xml version="1.0" encoding="utf-8"?>
 <p:sld xmlns:a="http://schemas.openxmlformats.org/drawingml/2006/main" xmlns:r="http://schemas.openxmlformats.org/officeDocument/2006/relationships" xmlns:p="http://schemas.openxmlformats.org/presentationml/2006/main">
   <p:cSld>
     <p:spTree>
@@ -7236,7 +7638,7 @@
           <a:p>
             <a:r>
               <a:rPr lang="en-US" sz="4000" b="1" dirty="0" err="1"/>
-              <a:t>CommonFunctions</a:t>
+              <a:t>SystemOperations</a:t>
             </a:r>
             <a:endParaRPr lang="en-US" sz="4000" b="1" dirty="0"/>
           </a:p>
@@ -7255,7 +7657,7 @@
 </p:sld>
 </file>
 
-<file path=ppt/slides/slide28.xml><?xml version="1.0" encoding="utf-8"?>
+<file path=ppt/slides/slide29.xml><?xml version="1.0" encoding="utf-8"?>
 <p:sld xmlns:a="http://schemas.openxmlformats.org/drawingml/2006/main" xmlns:r="http://schemas.openxmlformats.org/officeDocument/2006/relationships" xmlns:p="http://schemas.openxmlformats.org/presentationml/2006/main">
   <p:cSld>
     <p:spTree>
@@ -7309,18 +7711,11 @@
             <a:pPr algn="l"/>
             <a:r>
               <a:rPr lang="en-US" sz="1800" b="1" dirty="0" err="1"/>
-              <a:t>common_functions</a:t>
+              <a:t>System_operations</a:t>
             </a:r>
             <a:r>
               <a:rPr lang="en-US" sz="1800" b="1" dirty="0"/>
-              <a:t>:</a:t>
-            </a:r>
-          </a:p>
-          <a:p>
-            <a:pPr algn="l"/>
-            <a:r>
-              <a:rPr lang="en-US" sz="1600" dirty="0"/>
-              <a:t>Init – ✅</a:t>
+              <a:t>: (6 functions)</a:t>
             </a:r>
           </a:p>
           <a:p>
@@ -7388,32 +7783,6 @@
               <a:rPr lang="en-US" sz="1600" dirty="0"/>
               <a:t> - ✅</a:t>
             </a:r>
-          </a:p>
-          <a:p>
-            <a:pPr algn="l"/>
-            <a:r>
-              <a:rPr lang="en-US" sz="1600" dirty="0" err="1"/>
-              <a:t>is_common_functions_page_visible</a:t>
-            </a:r>
-            <a:r>
-              <a:rPr lang="en-US" sz="1600" dirty="0"/>
-              <a:t> - ✅</a:t>
-            </a:r>
-          </a:p>
-          <a:p>
-            <a:pPr algn="l"/>
-            <a:r>
-              <a:rPr lang="en-US" sz="1600" dirty="0" err="1"/>
-              <a:t>click_button</a:t>
-            </a:r>
-            <a:r>
-              <a:rPr lang="en-US" sz="1600" dirty="0"/>
-              <a:t> - ✅</a:t>
-            </a:r>
-          </a:p>
-          <a:p>
-            <a:pPr algn="l"/>
-            <a:endParaRPr lang="en-US" sz="1600" dirty="0"/>
           </a:p>
           <a:p>
             <a:pPr algn="l"/>
@@ -7481,100 +7850,6 @@
     <p:extLst>
       <p:ext uri="{BB962C8B-B14F-4D97-AF65-F5344CB8AC3E}">
         <p14:creationId xmlns:p14="http://schemas.microsoft.com/office/powerpoint/2010/main" val="1153328505"/>
-      </p:ext>
-    </p:extLst>
-  </p:cSld>
-  <p:clrMapOvr>
-    <a:masterClrMapping/>
-  </p:clrMapOvr>
-</p:sld>
-</file>
-
-<file path=ppt/slides/slide29.xml><?xml version="1.0" encoding="utf-8"?>
-<p:sld xmlns:a="http://schemas.openxmlformats.org/drawingml/2006/main" xmlns:r="http://schemas.openxmlformats.org/officeDocument/2006/relationships" xmlns:p="http://schemas.openxmlformats.org/presentationml/2006/main">
-  <p:cSld>
-    <p:spTree>
-      <p:nvGrpSpPr>
-        <p:cNvPr id="1" name="">
-          <a:extLst>
-            <a:ext uri="{FF2B5EF4-FFF2-40B4-BE49-F238E27FC236}">
-              <a16:creationId xmlns:a16="http://schemas.microsoft.com/office/drawing/2014/main" id="{3D3B0079-7319-3CFA-B0EA-1A211C0E1854}"/>
-            </a:ext>
-          </a:extLst>
-        </p:cNvPr>
-        <p:cNvGrpSpPr/>
-        <p:nvPr/>
-      </p:nvGrpSpPr>
-      <p:grpSpPr>
-        <a:xfrm>
-          <a:off x="0" y="0"/>
-          <a:ext cx="0" cy="0"/>
-          <a:chOff x="0" y="0"/>
-          <a:chExt cx="0" cy="0"/>
-        </a:xfrm>
-      </p:grpSpPr>
-      <p:sp>
-        <p:nvSpPr>
-          <p:cNvPr id="5" name="Subtitle 4">
-            <a:extLst>
-              <a:ext uri="{FF2B5EF4-FFF2-40B4-BE49-F238E27FC236}">
-                <a16:creationId xmlns:a16="http://schemas.microsoft.com/office/drawing/2014/main" id="{A6A62573-F0CF-1D7C-1A8C-A5867DD6D916}"/>
-              </a:ext>
-            </a:extLst>
-          </p:cNvPr>
-          <p:cNvSpPr>
-            <a:spLocks noGrp="1"/>
-          </p:cNvSpPr>
-          <p:nvPr>
-            <p:ph type="subTitle" idx="1"/>
-          </p:nvPr>
-        </p:nvSpPr>
-        <p:spPr>
-          <a:xfrm>
-            <a:off x="73152" y="91440"/>
-            <a:ext cx="12042648" cy="6693408"/>
-          </a:xfrm>
-          <a:solidFill>
-            <a:schemeClr val="accent4">
-              <a:lumMod val="40000"/>
-              <a:lumOff val="60000"/>
-            </a:schemeClr>
-          </a:solidFill>
-        </p:spPr>
-        <p:txBody>
-          <a:bodyPr/>
-          <a:lstStyle/>
-          <a:p>
-            <a:endParaRPr lang="en-US" dirty="0"/>
-          </a:p>
-          <a:p>
-            <a:endParaRPr lang="en-US" dirty="0"/>
-          </a:p>
-          <a:p>
-            <a:endParaRPr lang="en-US" dirty="0"/>
-          </a:p>
-          <a:p>
-            <a:endParaRPr lang="en-US" dirty="0"/>
-          </a:p>
-          <a:p>
-            <a:endParaRPr lang="en-US" dirty="0"/>
-          </a:p>
-          <a:p>
-            <a:endParaRPr lang="en-US" dirty="0"/>
-          </a:p>
-          <a:p>
-            <a:r>
-              <a:rPr lang="en-US" sz="4000" b="1" dirty="0" err="1"/>
-              <a:t>UpperPanel</a:t>
-            </a:r>
-            <a:endParaRPr lang="en-US" sz="4000" b="1" dirty="0"/>
-          </a:p>
-        </p:txBody>
-      </p:sp>
-    </p:spTree>
-    <p:extLst>
-      <p:ext uri="{BB962C8B-B14F-4D97-AF65-F5344CB8AC3E}">
-        <p14:creationId xmlns:p14="http://schemas.microsoft.com/office/powerpoint/2010/main" val="4234215970"/>
       </p:ext>
     </p:extLst>
   </p:cSld>
@@ -7686,6 +7961,100 @@
         <p:cNvPr id="1" name="">
           <a:extLst>
             <a:ext uri="{FF2B5EF4-FFF2-40B4-BE49-F238E27FC236}">
+              <a16:creationId xmlns:a16="http://schemas.microsoft.com/office/drawing/2014/main" id="{3D3B0079-7319-3CFA-B0EA-1A211C0E1854}"/>
+            </a:ext>
+          </a:extLst>
+        </p:cNvPr>
+        <p:cNvGrpSpPr/>
+        <p:nvPr/>
+      </p:nvGrpSpPr>
+      <p:grpSpPr>
+        <a:xfrm>
+          <a:off x="0" y="0"/>
+          <a:ext cx="0" cy="0"/>
+          <a:chOff x="0" y="0"/>
+          <a:chExt cx="0" cy="0"/>
+        </a:xfrm>
+      </p:grpSpPr>
+      <p:sp>
+        <p:nvSpPr>
+          <p:cNvPr id="5" name="Subtitle 4">
+            <a:extLst>
+              <a:ext uri="{FF2B5EF4-FFF2-40B4-BE49-F238E27FC236}">
+                <a16:creationId xmlns:a16="http://schemas.microsoft.com/office/drawing/2014/main" id="{A6A62573-F0CF-1D7C-1A8C-A5867DD6D916}"/>
+              </a:ext>
+            </a:extLst>
+          </p:cNvPr>
+          <p:cNvSpPr>
+            <a:spLocks noGrp="1"/>
+          </p:cNvSpPr>
+          <p:nvPr>
+            <p:ph type="subTitle" idx="1"/>
+          </p:nvPr>
+        </p:nvSpPr>
+        <p:spPr>
+          <a:xfrm>
+            <a:off x="73152" y="91440"/>
+            <a:ext cx="12042648" cy="6693408"/>
+          </a:xfrm>
+          <a:solidFill>
+            <a:schemeClr val="accent4">
+              <a:lumMod val="40000"/>
+              <a:lumOff val="60000"/>
+            </a:schemeClr>
+          </a:solidFill>
+        </p:spPr>
+        <p:txBody>
+          <a:bodyPr/>
+          <a:lstStyle/>
+          <a:p>
+            <a:endParaRPr lang="en-US" dirty="0"/>
+          </a:p>
+          <a:p>
+            <a:endParaRPr lang="en-US" dirty="0"/>
+          </a:p>
+          <a:p>
+            <a:endParaRPr lang="en-US" dirty="0"/>
+          </a:p>
+          <a:p>
+            <a:endParaRPr lang="en-US" dirty="0"/>
+          </a:p>
+          <a:p>
+            <a:endParaRPr lang="en-US" dirty="0"/>
+          </a:p>
+          <a:p>
+            <a:endParaRPr lang="en-US" dirty="0"/>
+          </a:p>
+          <a:p>
+            <a:r>
+              <a:rPr lang="en-US" sz="4000" b="1" dirty="0" err="1"/>
+              <a:t>UpperPanel</a:t>
+            </a:r>
+            <a:endParaRPr lang="en-US" sz="4000" b="1" dirty="0"/>
+          </a:p>
+        </p:txBody>
+      </p:sp>
+    </p:spTree>
+    <p:extLst>
+      <p:ext uri="{BB962C8B-B14F-4D97-AF65-F5344CB8AC3E}">
+        <p14:creationId xmlns:p14="http://schemas.microsoft.com/office/powerpoint/2010/main" val="4234215970"/>
+      </p:ext>
+    </p:extLst>
+  </p:cSld>
+  <p:clrMapOvr>
+    <a:masterClrMapping/>
+  </p:clrMapOvr>
+</p:sld>
+</file>
+
+<file path=ppt/slides/slide31.xml><?xml version="1.0" encoding="utf-8"?>
+<p:sld xmlns:a="http://schemas.openxmlformats.org/drawingml/2006/main" xmlns:r="http://schemas.openxmlformats.org/officeDocument/2006/relationships" xmlns:p="http://schemas.openxmlformats.org/presentationml/2006/main">
+  <p:cSld>
+    <p:spTree>
+      <p:nvGrpSpPr>
+        <p:cNvPr id="1" name="">
+          <a:extLst>
+            <a:ext uri="{FF2B5EF4-FFF2-40B4-BE49-F238E27FC236}">
               <a16:creationId xmlns:a16="http://schemas.microsoft.com/office/drawing/2014/main" id="{8C6D14C1-12E4-39B3-6222-2761FFB27BF8}"/>
             </a:ext>
           </a:extLst>
@@ -7736,14 +8105,7 @@
             </a:r>
             <a:r>
               <a:rPr lang="en-US" sz="1800" b="1" dirty="0"/>
-              <a:t>:</a:t>
-            </a:r>
-          </a:p>
-          <a:p>
-            <a:pPr algn="l"/>
-            <a:r>
-              <a:rPr lang="en-US" sz="1600" dirty="0"/>
-              <a:t>Init – ✅</a:t>
+              <a:t>: (24 functions)</a:t>
             </a:r>
           </a:p>
           <a:p>
@@ -7860,40 +8222,7 @@
             <a:pPr algn="l"/>
             <a:r>
               <a:rPr lang="en-US" sz="1600" dirty="0" err="1"/>
-              <a:t>close_global_search</a:t>
-            </a:r>
-            <a:r>
-              <a:rPr lang="en-US" sz="1600" dirty="0"/>
-              <a:t> – ✅</a:t>
-            </a:r>
-          </a:p>
-          <a:p>
-            <a:pPr algn="l"/>
-            <a:r>
-              <a:rPr lang="en-US" sz="1600" dirty="0" err="1"/>
-              <a:t>click_on_sub_domains_dropdown</a:t>
-            </a:r>
-            <a:r>
-              <a:rPr lang="en-US" sz="1600" dirty="0"/>
-              <a:t> – ✅</a:t>
-            </a:r>
-          </a:p>
-          <a:p>
-            <a:pPr algn="l"/>
-            <a:r>
-              <a:rPr lang="en-US" sz="1600" dirty="0" err="1"/>
-              <a:t>select_sub_domain</a:t>
-            </a:r>
-            <a:r>
-              <a:rPr lang="en-US" sz="1600" dirty="0"/>
-              <a:t> – ✅</a:t>
-            </a:r>
-          </a:p>
-          <a:p>
-            <a:pPr algn="l"/>
-            <a:r>
-              <a:rPr lang="en-US" sz="1600" dirty="0" err="1"/>
-              <a:t>click_back_to_sub_domain_map</a:t>
+              <a:t>click_on_device_via_global_search</a:t>
             </a:r>
             <a:r>
               <a:rPr lang="en-US" sz="1600" dirty="0"/>
@@ -7904,22 +8233,44 @@
             <a:pPr algn="l"/>
             <a:r>
               <a:rPr lang="en-US" sz="1600" dirty="0" err="1"/>
-              <a:t>click_on_domains_dropdown</a:t>
-            </a:r>
-            <a:r>
-              <a:rPr lang="en-US" sz="1600" dirty="0"/>
-              <a:t> –  ✅</a:t>
-            </a:r>
-          </a:p>
-          <a:p>
-            <a:pPr algn="l"/>
-            <a:r>
-              <a:rPr lang="en-US" sz="1600" dirty="0" err="1"/>
-              <a:t>select_domain</a:t>
-            </a:r>
-            <a:r>
-              <a:rPr lang="en-US" sz="1600" dirty="0"/>
-              <a:t> – ✅</a:t>
+              <a:t>click_on_device_service_list_tab_via_global_search</a:t>
+            </a:r>
+            <a:r>
+              <a:rPr lang="en-US" sz="1600" dirty="0"/>
+              <a:t> - ✅</a:t>
+            </a:r>
+          </a:p>
+          <a:p>
+            <a:pPr algn="l"/>
+            <a:r>
+              <a:rPr lang="en-US" sz="1600" dirty="0" err="1"/>
+              <a:t>click_on_device_performance_tab_via_global_search</a:t>
+            </a:r>
+            <a:r>
+              <a:rPr lang="en-US" sz="1600" dirty="0"/>
+              <a:t> - ✅</a:t>
+            </a:r>
+          </a:p>
+          <a:p>
+            <a:pPr algn="l"/>
+            <a:r>
+              <a:rPr lang="en-US" sz="1600" dirty="0" err="1"/>
+              <a:t>click_on_service_via_global_search</a:t>
+            </a:r>
+            <a:r>
+              <a:rPr lang="en-US" sz="1600" dirty="0"/>
+              <a:t> -</a:t>
+            </a:r>
+          </a:p>
+          <a:p>
+            <a:pPr algn="l"/>
+            <a:r>
+              <a:rPr lang="en-US" sz="1600" dirty="0" err="1"/>
+              <a:t>get_recent_searces</a:t>
+            </a:r>
+            <a:r>
+              <a:rPr lang="en-US" sz="1600" dirty="0"/>
+              <a:t> - ✅</a:t>
             </a:r>
           </a:p>
           <a:p>
@@ -7945,58 +8296,6 @@
           <a:p>
             <a:pPr algn="l"/>
             <a:endParaRPr lang="en-US" sz="1600" dirty="0"/>
-          </a:p>
-        </p:txBody>
-      </p:sp>
-      <p:sp>
-        <p:nvSpPr>
-          <p:cNvPr id="2" name="TextBox 1">
-            <a:extLst>
-              <a:ext uri="{FF2B5EF4-FFF2-40B4-BE49-F238E27FC236}">
-                <a16:creationId xmlns:a16="http://schemas.microsoft.com/office/drawing/2014/main" id="{F7BD85CC-DEA6-5756-19AA-2817939B29DA}"/>
-              </a:ext>
-            </a:extLst>
-          </p:cNvPr>
-          <p:cNvSpPr txBox="1"/>
-          <p:nvPr/>
-        </p:nvSpPr>
-        <p:spPr>
-          <a:xfrm>
-            <a:off x="9858568" y="199942"/>
-            <a:ext cx="1982724" cy="369332"/>
-          </a:xfrm>
-          <a:prstGeom prst="rect">
-            <a:avLst/>
-          </a:prstGeom>
-          <a:noFill/>
-        </p:spPr>
-        <p:txBody>
-          <a:bodyPr wrap="square" rtlCol="0">
-            <a:spAutoFit/>
-          </a:bodyPr>
-          <a:lstStyle/>
-          <a:p>
-            <a:r>
-              <a:rPr lang="en-US" b="1" dirty="0">
-                <a:highlight>
-                  <a:srgbClr val="FFFF00"/>
-                </a:highlight>
-              </a:rPr>
-              <a:t>Summary</a:t>
-            </a:r>
-            <a:r>
-              <a:rPr lang="en-US" b="1">
-                <a:highlight>
-                  <a:srgbClr val="FFFF00"/>
-                </a:highlight>
-              </a:rPr>
-              <a:t>: 88%</a:t>
-            </a:r>
-            <a:endParaRPr lang="en-US" sz="1200" b="1" dirty="0">
-              <a:highlight>
-                <a:srgbClr val="FFFF00"/>
-              </a:highlight>
-            </a:endParaRPr>
           </a:p>
         </p:txBody>
       </p:sp>
@@ -8013,7 +8312,211 @@
 </p:sld>
 </file>
 
-<file path=ppt/slides/slide31.xml><?xml version="1.0" encoding="utf-8"?>
+<file path=ppt/slides/slide32.xml><?xml version="1.0" encoding="utf-8"?>
+<p:sld xmlns:a="http://schemas.openxmlformats.org/drawingml/2006/main" xmlns:r="http://schemas.openxmlformats.org/officeDocument/2006/relationships" xmlns:p="http://schemas.openxmlformats.org/presentationml/2006/main">
+  <p:cSld>
+    <p:spTree>
+      <p:nvGrpSpPr>
+        <p:cNvPr id="1" name="">
+          <a:extLst>
+            <a:ext uri="{FF2B5EF4-FFF2-40B4-BE49-F238E27FC236}">
+              <a16:creationId xmlns:a16="http://schemas.microsoft.com/office/drawing/2014/main" id="{6D77C12F-A8EA-8DBB-834B-25D783198C0E}"/>
+            </a:ext>
+          </a:extLst>
+        </p:cNvPr>
+        <p:cNvGrpSpPr/>
+        <p:nvPr/>
+      </p:nvGrpSpPr>
+      <p:grpSpPr>
+        <a:xfrm>
+          <a:off x="0" y="0"/>
+          <a:ext cx="0" cy="0"/>
+          <a:chOff x="0" y="0"/>
+          <a:chExt cx="0" cy="0"/>
+        </a:xfrm>
+      </p:grpSpPr>
+      <p:sp>
+        <p:nvSpPr>
+          <p:cNvPr id="3" name="Subtitle 2">
+            <a:extLst>
+              <a:ext uri="{FF2B5EF4-FFF2-40B4-BE49-F238E27FC236}">
+                <a16:creationId xmlns:a16="http://schemas.microsoft.com/office/drawing/2014/main" id="{8C17DEBF-219B-B8AE-F5C5-8535A0195078}"/>
+              </a:ext>
+            </a:extLst>
+          </p:cNvPr>
+          <p:cNvSpPr>
+            <a:spLocks noGrp="1"/>
+          </p:cNvSpPr>
+          <p:nvPr>
+            <p:ph type="subTitle" idx="1"/>
+          </p:nvPr>
+        </p:nvSpPr>
+        <p:spPr>
+          <a:xfrm>
+            <a:off x="106680" y="99886"/>
+            <a:ext cx="11990832" cy="6666674"/>
+          </a:xfrm>
+        </p:spPr>
+        <p:txBody>
+          <a:bodyPr>
+            <a:normAutofit/>
+          </a:bodyPr>
+          <a:lstStyle/>
+          <a:p>
+            <a:pPr algn="l"/>
+            <a:r>
+              <a:rPr lang="en-US" sz="1800" b="1" dirty="0" err="1"/>
+              <a:t>upper_panel</a:t>
+            </a:r>
+            <a:r>
+              <a:rPr lang="en-US" sz="1800" b="1" dirty="0"/>
+              <a:t>: </a:t>
+            </a:r>
+            <a:r>
+              <a:rPr lang="en-US" sz="1600" b="1" dirty="0"/>
+              <a:t>(24 functions)</a:t>
+            </a:r>
+            <a:endParaRPr lang="en-US" sz="1600" dirty="0"/>
+          </a:p>
+          <a:p>
+            <a:pPr algn="l"/>
+            <a:r>
+              <a:rPr lang="en-US" sz="1600" dirty="0" err="1"/>
+              <a:t>close_global_search</a:t>
+            </a:r>
+            <a:r>
+              <a:rPr lang="en-US" sz="1600" dirty="0"/>
+              <a:t> – ✅</a:t>
+            </a:r>
+          </a:p>
+          <a:p>
+            <a:pPr algn="l"/>
+            <a:r>
+              <a:rPr lang="en-US" sz="1600" dirty="0" err="1"/>
+              <a:t>select_sub_domain</a:t>
+            </a:r>
+            <a:r>
+              <a:rPr lang="en-US" sz="1600" dirty="0"/>
+              <a:t> – ✅</a:t>
+            </a:r>
+          </a:p>
+          <a:p>
+            <a:pPr algn="l"/>
+            <a:r>
+              <a:rPr lang="en-US" sz="1600" dirty="0" err="1"/>
+              <a:t>click_back_to_sub_domain_map</a:t>
+            </a:r>
+            <a:r>
+              <a:rPr lang="en-US" sz="1600" dirty="0"/>
+              <a:t> - ✅</a:t>
+            </a:r>
+          </a:p>
+          <a:p>
+            <a:pPr algn="l"/>
+            <a:r>
+              <a:rPr lang="en-US" sz="1600" dirty="0" err="1"/>
+              <a:t>click_on_domains_dropdown</a:t>
+            </a:r>
+            <a:r>
+              <a:rPr lang="en-US" sz="1600" dirty="0"/>
+              <a:t> –  ✅</a:t>
+            </a:r>
+          </a:p>
+          <a:p>
+            <a:pPr algn="l"/>
+            <a:r>
+              <a:rPr lang="en-US" sz="1600" dirty="0" err="1"/>
+              <a:t>select_domain</a:t>
+            </a:r>
+            <a:r>
+              <a:rPr lang="en-US" sz="1600" dirty="0"/>
+              <a:t> – ✅</a:t>
+            </a:r>
+          </a:p>
+          <a:p>
+            <a:pPr algn="l"/>
+            <a:endParaRPr lang="en-US" sz="1600" dirty="0"/>
+          </a:p>
+          <a:p>
+            <a:pPr algn="l"/>
+            <a:endParaRPr lang="en-US" sz="1600" dirty="0"/>
+          </a:p>
+          <a:p>
+            <a:pPr algn="l"/>
+            <a:endParaRPr lang="en-US" sz="1100" dirty="0"/>
+          </a:p>
+          <a:p>
+            <a:pPr algn="l"/>
+            <a:endParaRPr lang="en-US" sz="1600" dirty="0"/>
+          </a:p>
+          <a:p>
+            <a:pPr algn="l"/>
+            <a:endParaRPr lang="en-US" sz="1600" dirty="0"/>
+          </a:p>
+          <a:p>
+            <a:pPr algn="l"/>
+            <a:endParaRPr lang="en-US" sz="1600" dirty="0"/>
+          </a:p>
+        </p:txBody>
+      </p:sp>
+      <p:sp>
+        <p:nvSpPr>
+          <p:cNvPr id="2" name="TextBox 1">
+            <a:extLst>
+              <a:ext uri="{FF2B5EF4-FFF2-40B4-BE49-F238E27FC236}">
+                <a16:creationId xmlns:a16="http://schemas.microsoft.com/office/drawing/2014/main" id="{AF751798-5090-0FB8-A69D-C0C71DE9B82D}"/>
+              </a:ext>
+            </a:extLst>
+          </p:cNvPr>
+          <p:cNvSpPr txBox="1"/>
+          <p:nvPr/>
+        </p:nvSpPr>
+        <p:spPr>
+          <a:xfrm>
+            <a:off x="9858568" y="199942"/>
+            <a:ext cx="1982724" cy="369332"/>
+          </a:xfrm>
+          <a:prstGeom prst="rect">
+            <a:avLst/>
+          </a:prstGeom>
+          <a:noFill/>
+        </p:spPr>
+        <p:txBody>
+          <a:bodyPr wrap="square" rtlCol="0">
+            <a:spAutoFit/>
+          </a:bodyPr>
+          <a:lstStyle/>
+          <a:p>
+            <a:r>
+              <a:rPr lang="en-US" b="1" dirty="0">
+                <a:highlight>
+                  <a:srgbClr val="FFFF00"/>
+                </a:highlight>
+              </a:rPr>
+              <a:t>Summary: 70%</a:t>
+            </a:r>
+            <a:endParaRPr lang="en-US" sz="1200" b="1" dirty="0">
+              <a:highlight>
+                <a:srgbClr val="FFFF00"/>
+              </a:highlight>
+            </a:endParaRPr>
+          </a:p>
+        </p:txBody>
+      </p:sp>
+    </p:spTree>
+    <p:extLst>
+      <p:ext uri="{BB962C8B-B14F-4D97-AF65-F5344CB8AC3E}">
+        <p14:creationId xmlns:p14="http://schemas.microsoft.com/office/powerpoint/2010/main" val="596537425"/>
+      </p:ext>
+    </p:extLst>
+  </p:cSld>
+  <p:clrMapOvr>
+    <a:masterClrMapping/>
+  </p:clrMapOvr>
+</p:sld>
+</file>
+
+<file path=ppt/slides/slide33.xml><?xml version="1.0" encoding="utf-8"?>
 <p:sld xmlns:a="http://schemas.openxmlformats.org/drawingml/2006/main" xmlns:r="http://schemas.openxmlformats.org/officeDocument/2006/relationships" xmlns:p="http://schemas.openxmlformats.org/presentationml/2006/main">
   <p:cSld>
     <p:spTree>
@@ -8859,7 +9362,7 @@
             </a:r>
             <a:r>
               <a:rPr lang="en-US" sz="1800" b="1" dirty="0"/>
-              <a:t>:</a:t>
+              <a:t>: (15 functions)</a:t>
             </a:r>
           </a:p>
           <a:p>
@@ -8873,7 +9376,7 @@
             <a:pPr algn="l"/>
             <a:r>
               <a:rPr lang="en-US" sz="1600" dirty="0" err="1"/>
-              <a:t>click_management_map</a:t>
+              <a:t>click_network_topology</a:t>
             </a:r>
             <a:r>
               <a:rPr lang="en-US" sz="1600" dirty="0"/>
@@ -8961,7 +9464,7 @@
             <a:pPr algn="l"/>
             <a:r>
               <a:rPr lang="en-US" sz="1600" dirty="0" err="1"/>
-              <a:t>click_common_functions</a:t>
+              <a:t>click_system_operations</a:t>
             </a:r>
             <a:r>
               <a:rPr lang="en-US" sz="1600" dirty="0"/>
@@ -9157,7 +9660,7 @@
           <a:p>
             <a:r>
               <a:rPr lang="en-US" sz="4000" b="1" dirty="0" err="1"/>
-              <a:t>ManagementMap</a:t>
+              <a:t>NetworkTopology</a:t>
             </a:r>
             <a:endParaRPr lang="en-US" sz="4000" b="1" dirty="0"/>
           </a:p>
@@ -9223,18 +9726,18 @@
         </p:spPr>
         <p:txBody>
           <a:bodyPr>
-            <a:normAutofit fontScale="92500" lnSpcReduction="20000"/>
+            <a:normAutofit fontScale="85000" lnSpcReduction="20000"/>
           </a:bodyPr>
           <a:lstStyle/>
           <a:p>
             <a:pPr algn="l"/>
             <a:r>
               <a:rPr lang="en-US" sz="1800" b="1" dirty="0" err="1"/>
-              <a:t>management_map</a:t>
+              <a:t>Network_topology</a:t>
             </a:r>
             <a:r>
               <a:rPr lang="en-US" sz="1800" b="1" dirty="0"/>
-              <a:t>:</a:t>
+              <a:t>: (45 functions)</a:t>
             </a:r>
           </a:p>
           <a:p>
@@ -9340,7 +9843,7 @@
             <a:pPr algn="l"/>
             <a:r>
               <a:rPr lang="en-US" sz="1600" dirty="0" err="1"/>
-              <a:t>enable_drag</a:t>
+              <a:t>unlock_map</a:t>
             </a:r>
             <a:r>
               <a:rPr lang="en-US" sz="1600" dirty="0"/>
@@ -9373,11 +9876,33 @@
             <a:pPr algn="l"/>
             <a:r>
               <a:rPr lang="en-US" sz="1600" dirty="0" err="1"/>
+              <a:t>double_click_on_element_via_the_map_by_data_id</a:t>
+            </a:r>
+            <a:r>
+              <a:rPr lang="en-US" sz="1600" dirty="0"/>
+              <a:t> – ✅</a:t>
+            </a:r>
+          </a:p>
+          <a:p>
+            <a:pPr algn="l"/>
+            <a:r>
+              <a:rPr lang="en-US" sz="1600" dirty="0" err="1"/>
+              <a:t>click_on_element_via_the_map_by_data_id</a:t>
+            </a:r>
+            <a:r>
+              <a:rPr lang="en-US" sz="1600" dirty="0"/>
+              <a:t> – ✅</a:t>
+            </a:r>
+          </a:p>
+          <a:p>
+            <a:pPr algn="l"/>
+            <a:r>
+              <a:rPr lang="en-US" sz="1600" dirty="0" err="1"/>
               <a:t>double_click_on_element_via_the_map</a:t>
             </a:r>
             <a:r>
               <a:rPr lang="en-US" sz="1600" dirty="0"/>
-              <a:t> – ✅</a:t>
+              <a:t> - ✅</a:t>
             </a:r>
           </a:p>
           <a:p>
@@ -9388,7 +9913,7 @@
             </a:r>
             <a:r>
               <a:rPr lang="en-US" sz="1600" dirty="0"/>
-              <a:t> – ✅</a:t>
+              <a:t> - ✅</a:t>
             </a:r>
           </a:p>
           <a:p>
@@ -9409,12 +9934,8 @@
               <a:t>get_map_element_color</a:t>
             </a:r>
             <a:r>
-              <a:rPr lang="en-US" sz="1600"/>
-              <a:t> - </a:t>
-            </a:r>
-            <a:r>
-              <a:rPr lang="en-US" sz="1600" dirty="0"/>
-              <a:t>✅</a:t>
+              <a:rPr lang="en-US" sz="1600" dirty="0"/>
+              <a:t> - ✅</a:t>
             </a:r>
           </a:p>
           <a:p>
@@ -9534,18 +10055,18 @@
         </p:spPr>
         <p:txBody>
           <a:bodyPr>
-            <a:normAutofit fontScale="92500" lnSpcReduction="10000"/>
+            <a:normAutofit/>
           </a:bodyPr>
           <a:lstStyle/>
           <a:p>
             <a:pPr algn="l"/>
             <a:r>
               <a:rPr lang="en-US" sz="1800" b="1" dirty="0" err="1"/>
-              <a:t>management_map</a:t>
+              <a:t>Network_topology</a:t>
             </a:r>
             <a:r>
               <a:rPr lang="en-US" sz="1800" b="1" dirty="0"/>
-              <a:t>:</a:t>
+              <a:t>: (45 functions)</a:t>
             </a:r>
           </a:p>
           <a:p>
@@ -9563,6 +10084,28 @@
             <a:pPr algn="l"/>
             <a:r>
               <a:rPr lang="en-US" sz="1600" dirty="0" err="1"/>
+              <a:t>get_zoom_percentage</a:t>
+            </a:r>
+            <a:r>
+              <a:rPr lang="en-US" sz="1600" dirty="0"/>
+              <a:t> – ✅</a:t>
+            </a:r>
+          </a:p>
+          <a:p>
+            <a:pPr algn="l"/>
+            <a:r>
+              <a:rPr lang="en-US" sz="1600" dirty="0" err="1"/>
+              <a:t>reset_zoom_percentage</a:t>
+            </a:r>
+            <a:r>
+              <a:rPr lang="en-US" sz="1600" dirty="0"/>
+              <a:t> - ✅</a:t>
+            </a:r>
+          </a:p>
+          <a:p>
+            <a:pPr algn="l"/>
+            <a:r>
+              <a:rPr lang="en-US" sz="1600" dirty="0" err="1"/>
               <a:t>show_navigation_info</a:t>
             </a:r>
             <a:r>
@@ -9600,226 +10143,111 @@
             </a:r>
             <a:r>
               <a:rPr lang="en-US" sz="1600" dirty="0"/>
-              <a:t> </a:t>
-            </a:r>
-            <a:r>
-              <a:rPr lang="en-US" sz="1600"/>
-              <a:t>– ✅</a:t>
-            </a:r>
+              <a:t> – ✅</a:t>
+            </a:r>
+          </a:p>
+          <a:p>
+            <a:pPr algn="l"/>
+            <a:r>
+              <a:rPr lang="en-US" sz="1600" dirty="0" err="1"/>
+              <a:t>navigation_info_double_click_on_element</a:t>
+            </a:r>
+            <a:r>
+              <a:rPr lang="en-US" sz="1600" dirty="0"/>
+              <a:t> – ✅</a:t>
+            </a:r>
+          </a:p>
+          <a:p>
+            <a:pPr algn="l"/>
+            <a:r>
+              <a:rPr lang="en-US" sz="1600" dirty="0" err="1"/>
+              <a:t>navigation_info_open_element_details</a:t>
+            </a:r>
+            <a:r>
+              <a:rPr lang="en-US" sz="1600" dirty="0"/>
+              <a:t> – ✅</a:t>
+            </a:r>
+          </a:p>
+          <a:p>
+            <a:pPr algn="l"/>
+            <a:r>
+              <a:rPr lang="en-US" sz="1600" dirty="0" err="1"/>
+              <a:t>navigation_info_close_element_details</a:t>
+            </a:r>
+            <a:r>
+              <a:rPr lang="en-US" sz="1600" dirty="0"/>
+              <a:t> – ✅</a:t>
+            </a:r>
+          </a:p>
+          <a:p>
+            <a:pPr algn="l"/>
+            <a:r>
+              <a:rPr lang="en-US" sz="1600" dirty="0" err="1"/>
+              <a:t>navigation_info_expand_element_byClick_on_arrow</a:t>
+            </a:r>
+            <a:r>
+              <a:rPr lang="en-US" sz="1600" dirty="0"/>
+              <a:t> -  ✅</a:t>
+            </a:r>
+          </a:p>
+          <a:p>
+            <a:pPr algn="l"/>
+            <a:r>
+              <a:rPr lang="en-US" sz="1600" dirty="0" err="1"/>
+              <a:t>navigation_info_shrink_element_byClick_on_arrow</a:t>
+            </a:r>
+            <a:r>
+              <a:rPr lang="en-US" sz="1600" dirty="0"/>
+              <a:t> -  ✅</a:t>
+            </a:r>
+          </a:p>
+          <a:p>
+            <a:pPr algn="l"/>
+            <a:r>
+              <a:rPr lang="en-US" sz="1600" dirty="0" err="1"/>
+              <a:t>element_details_click_on_chassis</a:t>
+            </a:r>
+            <a:r>
+              <a:rPr lang="en-US" sz="1600" dirty="0"/>
+              <a:t> – ✅</a:t>
+            </a:r>
+          </a:p>
+          <a:p>
+            <a:pPr algn="l"/>
+            <a:r>
+              <a:rPr lang="en-US" sz="1600" dirty="0" err="1"/>
+              <a:t>element_details_click_on_services</a:t>
+            </a:r>
+            <a:r>
+              <a:rPr lang="en-US" sz="1600" dirty="0"/>
+              <a:t> – ✅</a:t>
+            </a:r>
+          </a:p>
+          <a:p>
+            <a:pPr algn="l"/>
+            <a:r>
+              <a:rPr lang="en-US" sz="1600" dirty="0" err="1"/>
+              <a:t>element_details_click_on_faults</a:t>
+            </a:r>
+            <a:r>
+              <a:rPr lang="en-US" sz="1600" dirty="0"/>
+              <a:t> – ✅</a:t>
+            </a:r>
+          </a:p>
+          <a:p>
+            <a:pPr algn="l"/>
+            <a:r>
+              <a:rPr lang="en-US" sz="1600" dirty="0" err="1"/>
+              <a:t>element_details_click_on_info</a:t>
+            </a:r>
+            <a:r>
+              <a:rPr lang="en-US" sz="1600" dirty="0"/>
+              <a:t> – ✅</a:t>
+            </a:r>
+          </a:p>
+          <a:p>
+            <a:pPr algn="l"/>
             <a:endParaRPr lang="en-US" sz="1600" dirty="0"/>
-          </a:p>
-          <a:p>
-            <a:pPr algn="l"/>
-            <a:r>
-              <a:rPr lang="en-US" sz="1600" dirty="0" err="1"/>
-              <a:t>navigation_info_double_click_on_element</a:t>
-            </a:r>
-            <a:r>
-              <a:rPr lang="en-US" sz="1600" dirty="0"/>
-              <a:t> – ✅</a:t>
-            </a:r>
-          </a:p>
-          <a:p>
-            <a:pPr algn="l"/>
-            <a:r>
-              <a:rPr lang="en-US" sz="1600" dirty="0" err="1"/>
-              <a:t>navigation_info_open_element_details</a:t>
-            </a:r>
-            <a:r>
-              <a:rPr lang="en-US" sz="1600" dirty="0"/>
-              <a:t> – ✅</a:t>
-            </a:r>
-          </a:p>
-          <a:p>
-            <a:pPr algn="l"/>
-            <a:r>
-              <a:rPr lang="en-US" sz="1600" dirty="0" err="1"/>
-              <a:t>navigation_info_close_element_details</a:t>
-            </a:r>
-            <a:r>
-              <a:rPr lang="en-US" sz="1600" dirty="0"/>
-              <a:t> – ✅</a:t>
-            </a:r>
-          </a:p>
-          <a:p>
-            <a:pPr algn="l"/>
-            <a:r>
-              <a:rPr lang="en-US" sz="1600" dirty="0" err="1"/>
-              <a:t>navigation_info_expand_element_byClick_on_arrow</a:t>
-            </a:r>
-            <a:r>
-              <a:rPr lang="en-US" sz="1600" dirty="0"/>
-              <a:t> -  ✅</a:t>
-            </a:r>
-          </a:p>
-          <a:p>
-            <a:pPr algn="l"/>
-            <a:r>
-              <a:rPr lang="en-US" sz="1600" dirty="0" err="1"/>
-              <a:t>navigation_info_shrink_element_byClick_on_arrow</a:t>
-            </a:r>
-            <a:r>
-              <a:rPr lang="en-US" sz="1600" dirty="0"/>
-              <a:t> -  ✅</a:t>
-            </a:r>
-          </a:p>
-          <a:p>
-            <a:pPr algn="l"/>
-            <a:r>
-              <a:rPr lang="en-US" sz="1600" dirty="0" err="1"/>
-              <a:t>element_details_click_chassis</a:t>
-            </a:r>
-            <a:r>
-              <a:rPr lang="en-US" sz="1600" dirty="0"/>
-              <a:t> – ✅</a:t>
-            </a:r>
-          </a:p>
-          <a:p>
-            <a:pPr algn="l"/>
-            <a:r>
-              <a:rPr lang="en-US" sz="1600" dirty="0" err="1"/>
-              <a:t>element_details_click_services</a:t>
-            </a:r>
-            <a:r>
-              <a:rPr lang="en-US" sz="1600" dirty="0"/>
-              <a:t> – ✅</a:t>
-            </a:r>
-          </a:p>
-          <a:p>
-            <a:pPr algn="l"/>
-            <a:r>
-              <a:rPr lang="en-US" sz="1600" dirty="0" err="1"/>
-              <a:t>element_details_click_faults</a:t>
-            </a:r>
-            <a:r>
-              <a:rPr lang="en-US" sz="1600" dirty="0"/>
-              <a:t> – ✅</a:t>
-            </a:r>
-          </a:p>
-          <a:p>
-            <a:pPr algn="l"/>
-            <a:r>
-              <a:rPr lang="en-US" sz="1600" dirty="0" err="1"/>
-              <a:t>element_details_click_Info</a:t>
-            </a:r>
-            <a:r>
-              <a:rPr lang="en-US" sz="1600" dirty="0"/>
-              <a:t> – ✅</a:t>
-            </a:r>
-          </a:p>
-          <a:p>
-            <a:pPr algn="l"/>
-            <a:r>
-              <a:rPr lang="en-US" sz="1600" dirty="0" err="1"/>
-              <a:t>element_details_faults_click_on_alarms</a:t>
-            </a:r>
-            <a:r>
-              <a:rPr lang="en-US" sz="1600" dirty="0"/>
-              <a:t> – ✅</a:t>
-            </a:r>
-          </a:p>
-          <a:p>
-            <a:pPr algn="l"/>
-            <a:r>
-              <a:rPr lang="en-US" sz="1600" dirty="0" err="1"/>
-              <a:t>element_details_faults_view_all_alarms</a:t>
-            </a:r>
-            <a:r>
-              <a:rPr lang="en-US" sz="1600" dirty="0"/>
-              <a:t> – ✅</a:t>
-            </a:r>
-          </a:p>
-          <a:p>
-            <a:pPr algn="l"/>
-            <a:r>
-              <a:rPr lang="en-US" sz="1600" dirty="0" err="1"/>
-              <a:t>element_details_faults_get_all_alarms</a:t>
-            </a:r>
-            <a:r>
-              <a:rPr lang="en-US" sz="1600" dirty="0"/>
-              <a:t> – ✅</a:t>
-            </a:r>
-          </a:p>
-          <a:p>
-            <a:pPr algn="l"/>
-            <a:r>
-              <a:rPr lang="en-US" sz="1600" dirty="0" err="1"/>
-              <a:t>element_details_faults_click_on_events</a:t>
-            </a:r>
-            <a:r>
-              <a:rPr lang="en-US" sz="1600" dirty="0"/>
-              <a:t> – ✅</a:t>
-            </a:r>
-          </a:p>
-          <a:p>
-            <a:pPr algn="l"/>
-            <a:r>
-              <a:rPr lang="en-US" sz="1600" dirty="0" err="1"/>
-              <a:t>element_details_faults_view_all</a:t>
-            </a:r>
-            <a:r>
-              <a:rPr lang="en-US" sz="1600" dirty="0"/>
-              <a:t> _events – ✅</a:t>
-            </a:r>
-          </a:p>
-          <a:p>
-            <a:pPr algn="l"/>
-            <a:r>
-              <a:rPr lang="en-US" sz="1600" dirty="0" err="1"/>
-              <a:t>element_details_faults_get_all</a:t>
-            </a:r>
-            <a:r>
-              <a:rPr lang="en-US" sz="1600" dirty="0"/>
-              <a:t> _events – ✅</a:t>
-            </a:r>
-          </a:p>
-          <a:p>
-            <a:pPr algn="l"/>
-            <a:endParaRPr lang="en-US" sz="1600" dirty="0"/>
-          </a:p>
-        </p:txBody>
-      </p:sp>
-      <p:sp>
-        <p:nvSpPr>
-          <p:cNvPr id="2" name="TextBox 1">
-            <a:extLst>
-              <a:ext uri="{FF2B5EF4-FFF2-40B4-BE49-F238E27FC236}">
-                <a16:creationId xmlns:a16="http://schemas.microsoft.com/office/drawing/2014/main" id="{9FC5E475-1F92-FE00-35EE-7AC729FBAEDD}"/>
-              </a:ext>
-            </a:extLst>
-          </p:cNvPr>
-          <p:cNvSpPr txBox="1"/>
-          <p:nvPr/>
-        </p:nvSpPr>
-        <p:spPr>
-          <a:xfrm>
-            <a:off x="9858568" y="199942"/>
-            <a:ext cx="1982724" cy="369332"/>
-          </a:xfrm>
-          <a:prstGeom prst="rect">
-            <a:avLst/>
-          </a:prstGeom>
-          <a:noFill/>
-        </p:spPr>
-        <p:txBody>
-          <a:bodyPr wrap="square" rtlCol="0">
-            <a:spAutoFit/>
-          </a:bodyPr>
-          <a:lstStyle/>
-          <a:p>
-            <a:r>
-              <a:rPr lang="en-US" b="1" dirty="0">
-                <a:highlight>
-                  <a:srgbClr val="00FF00"/>
-                </a:highlight>
-              </a:rPr>
-              <a:t>Summary: 100%</a:t>
-            </a:r>
-            <a:endParaRPr lang="en-US" sz="1200" b="1" dirty="0">
-              <a:highlight>
-                <a:srgbClr val="00FF00"/>
-              </a:highlight>
-            </a:endParaRPr>
           </a:p>
         </p:txBody>
       </p:sp>
@@ -9837,6 +10265,196 @@
 </file>
 
 <file path=ppt/slides/slide8.xml><?xml version="1.0" encoding="utf-8"?>
+<p:sld xmlns:a="http://schemas.openxmlformats.org/drawingml/2006/main" xmlns:r="http://schemas.openxmlformats.org/officeDocument/2006/relationships" xmlns:p="http://schemas.openxmlformats.org/presentationml/2006/main">
+  <p:cSld>
+    <p:spTree>
+      <p:nvGrpSpPr>
+        <p:cNvPr id="1" name="">
+          <a:extLst>
+            <a:ext uri="{FF2B5EF4-FFF2-40B4-BE49-F238E27FC236}">
+              <a16:creationId xmlns:a16="http://schemas.microsoft.com/office/drawing/2014/main" id="{A26CD319-AAEF-C192-731E-C069EF7E6116}"/>
+            </a:ext>
+          </a:extLst>
+        </p:cNvPr>
+        <p:cNvGrpSpPr/>
+        <p:nvPr/>
+      </p:nvGrpSpPr>
+      <p:grpSpPr>
+        <a:xfrm>
+          <a:off x="0" y="0"/>
+          <a:ext cx="0" cy="0"/>
+          <a:chOff x="0" y="0"/>
+          <a:chExt cx="0" cy="0"/>
+        </a:xfrm>
+      </p:grpSpPr>
+      <p:sp>
+        <p:nvSpPr>
+          <p:cNvPr id="3" name="Subtitle 2">
+            <a:extLst>
+              <a:ext uri="{FF2B5EF4-FFF2-40B4-BE49-F238E27FC236}">
+                <a16:creationId xmlns:a16="http://schemas.microsoft.com/office/drawing/2014/main" id="{D67B9D06-2E6E-9296-EFB8-93FF37147BB6}"/>
+              </a:ext>
+            </a:extLst>
+          </p:cNvPr>
+          <p:cNvSpPr>
+            <a:spLocks noGrp="1"/>
+          </p:cNvSpPr>
+          <p:nvPr>
+            <p:ph type="subTitle" idx="1"/>
+          </p:nvPr>
+        </p:nvSpPr>
+        <p:spPr>
+          <a:xfrm>
+            <a:off x="106680" y="99886"/>
+            <a:ext cx="11990832" cy="6666674"/>
+          </a:xfrm>
+        </p:spPr>
+        <p:txBody>
+          <a:bodyPr>
+            <a:normAutofit/>
+          </a:bodyPr>
+          <a:lstStyle/>
+          <a:p>
+            <a:pPr algn="l"/>
+            <a:r>
+              <a:rPr lang="en-US" sz="1800" b="1" dirty="0" err="1"/>
+              <a:t>Network_topology</a:t>
+            </a:r>
+            <a:r>
+              <a:rPr lang="en-US" sz="1800" b="1" dirty="0"/>
+              <a:t>: (45 functions)</a:t>
+            </a:r>
+          </a:p>
+          <a:p>
+            <a:pPr algn="l"/>
+            <a:r>
+              <a:rPr lang="en-US" sz="1600" dirty="0" err="1"/>
+              <a:t>element_details_faults_click_on_alarms</a:t>
+            </a:r>
+            <a:r>
+              <a:rPr lang="en-US" sz="1600" dirty="0"/>
+              <a:t> – ✅</a:t>
+            </a:r>
+          </a:p>
+          <a:p>
+            <a:pPr algn="l"/>
+            <a:r>
+              <a:rPr lang="en-US" sz="1600" dirty="0" err="1"/>
+              <a:t>element_details_faults_view_all_alarms</a:t>
+            </a:r>
+            <a:r>
+              <a:rPr lang="en-US" sz="1600" dirty="0"/>
+              <a:t> – ✅</a:t>
+            </a:r>
+          </a:p>
+          <a:p>
+            <a:pPr algn="l"/>
+            <a:r>
+              <a:rPr lang="en-US" sz="1600" dirty="0" err="1"/>
+              <a:t>element_details_faults_get_all_alarms</a:t>
+            </a:r>
+            <a:r>
+              <a:rPr lang="en-US" sz="1600" dirty="0"/>
+              <a:t> – ✅</a:t>
+            </a:r>
+          </a:p>
+          <a:p>
+            <a:pPr algn="l"/>
+            <a:r>
+              <a:rPr lang="en-US" sz="1600" dirty="0" err="1"/>
+              <a:t>element_details_faults_click_on_events</a:t>
+            </a:r>
+            <a:r>
+              <a:rPr lang="en-US" sz="1600" dirty="0"/>
+              <a:t> – ✅</a:t>
+            </a:r>
+          </a:p>
+          <a:p>
+            <a:pPr algn="l"/>
+            <a:r>
+              <a:rPr lang="en-US" sz="1600" dirty="0" err="1"/>
+              <a:t>element_details_faults_view_all</a:t>
+            </a:r>
+            <a:r>
+              <a:rPr lang="en-US" sz="1600" dirty="0"/>
+              <a:t> _events – ✅</a:t>
+            </a:r>
+          </a:p>
+          <a:p>
+            <a:pPr algn="l"/>
+            <a:r>
+              <a:rPr lang="en-US" sz="1600" dirty="0" err="1"/>
+              <a:t>element_details_faults_get_all</a:t>
+            </a:r>
+            <a:r>
+              <a:rPr lang="en-US" sz="1600" dirty="0"/>
+              <a:t> _events – ✅</a:t>
+            </a:r>
+          </a:p>
+          <a:p>
+            <a:pPr algn="l"/>
+            <a:endParaRPr lang="en-US" sz="1600" dirty="0"/>
+          </a:p>
+        </p:txBody>
+      </p:sp>
+      <p:sp>
+        <p:nvSpPr>
+          <p:cNvPr id="2" name="TextBox 1">
+            <a:extLst>
+              <a:ext uri="{FF2B5EF4-FFF2-40B4-BE49-F238E27FC236}">
+                <a16:creationId xmlns:a16="http://schemas.microsoft.com/office/drawing/2014/main" id="{8C453531-F67C-D418-17FD-EA336F43A993}"/>
+              </a:ext>
+            </a:extLst>
+          </p:cNvPr>
+          <p:cNvSpPr txBox="1"/>
+          <p:nvPr/>
+        </p:nvSpPr>
+        <p:spPr>
+          <a:xfrm>
+            <a:off x="9858568" y="199942"/>
+            <a:ext cx="1982724" cy="369332"/>
+          </a:xfrm>
+          <a:prstGeom prst="rect">
+            <a:avLst/>
+          </a:prstGeom>
+          <a:noFill/>
+        </p:spPr>
+        <p:txBody>
+          <a:bodyPr wrap="square" rtlCol="0">
+            <a:spAutoFit/>
+          </a:bodyPr>
+          <a:lstStyle/>
+          <a:p>
+            <a:r>
+              <a:rPr lang="en-US" b="1" dirty="0">
+                <a:highlight>
+                  <a:srgbClr val="00FF00"/>
+                </a:highlight>
+              </a:rPr>
+              <a:t>Summary: 100%</a:t>
+            </a:r>
+            <a:endParaRPr lang="en-US" sz="1200" b="1" dirty="0">
+              <a:highlight>
+                <a:srgbClr val="00FF00"/>
+              </a:highlight>
+            </a:endParaRPr>
+          </a:p>
+        </p:txBody>
+      </p:sp>
+    </p:spTree>
+    <p:extLst>
+      <p:ext uri="{BB962C8B-B14F-4D97-AF65-F5344CB8AC3E}">
+        <p14:creationId xmlns:p14="http://schemas.microsoft.com/office/powerpoint/2010/main" val="2227015843"/>
+      </p:ext>
+    </p:extLst>
+  </p:cSld>
+  <p:clrMapOvr>
+    <a:masterClrMapping/>
+  </p:clrMapOvr>
+</p:sld>
+</file>
+
+<file path=ppt/slides/slide9.xml><?xml version="1.0" encoding="utf-8"?>
 <p:sld xmlns:a="http://schemas.openxmlformats.org/drawingml/2006/main" xmlns:r="http://schemas.openxmlformats.org/officeDocument/2006/relationships" xmlns:p="http://schemas.openxmlformats.org/presentationml/2006/main">
   <p:cSld>
     <p:spTree>
@@ -9921,348 +10539,6 @@
     <p:extLst>
       <p:ext uri="{BB962C8B-B14F-4D97-AF65-F5344CB8AC3E}">
         <p14:creationId xmlns:p14="http://schemas.microsoft.com/office/powerpoint/2010/main" val="3311629244"/>
-      </p:ext>
-    </p:extLst>
-  </p:cSld>
-  <p:clrMapOvr>
-    <a:masterClrMapping/>
-  </p:clrMapOvr>
-</p:sld>
-</file>
-
-<file path=ppt/slides/slide9.xml><?xml version="1.0" encoding="utf-8"?>
-<p:sld xmlns:a="http://schemas.openxmlformats.org/drawingml/2006/main" xmlns:r="http://schemas.openxmlformats.org/officeDocument/2006/relationships" xmlns:p="http://schemas.openxmlformats.org/presentationml/2006/main">
-  <p:cSld>
-    <p:spTree>
-      <p:nvGrpSpPr>
-        <p:cNvPr id="1" name="">
-          <a:extLst>
-            <a:ext uri="{FF2B5EF4-FFF2-40B4-BE49-F238E27FC236}">
-              <a16:creationId xmlns:a16="http://schemas.microsoft.com/office/drawing/2014/main" id="{B6AF5383-9449-4A68-E859-B2557D48BBAA}"/>
-            </a:ext>
-          </a:extLst>
-        </p:cNvPr>
-        <p:cNvGrpSpPr/>
-        <p:nvPr/>
-      </p:nvGrpSpPr>
-      <p:grpSpPr>
-        <a:xfrm>
-          <a:off x="0" y="0"/>
-          <a:ext cx="0" cy="0"/>
-          <a:chOff x="0" y="0"/>
-          <a:chExt cx="0" cy="0"/>
-        </a:xfrm>
-      </p:grpSpPr>
-      <p:sp>
-        <p:nvSpPr>
-          <p:cNvPr id="3" name="Subtitle 2">
-            <a:extLst>
-              <a:ext uri="{FF2B5EF4-FFF2-40B4-BE49-F238E27FC236}">
-                <a16:creationId xmlns:a16="http://schemas.microsoft.com/office/drawing/2014/main" id="{74D74155-EDE9-656C-2FE7-3694C136D79E}"/>
-              </a:ext>
-            </a:extLst>
-          </p:cNvPr>
-          <p:cNvSpPr>
-            <a:spLocks noGrp="1"/>
-          </p:cNvSpPr>
-          <p:nvPr>
-            <p:ph type="subTitle" idx="1"/>
-          </p:nvPr>
-        </p:nvSpPr>
-        <p:spPr>
-          <a:xfrm>
-            <a:off x="106680" y="99886"/>
-            <a:ext cx="11990832" cy="6666674"/>
-          </a:xfrm>
-        </p:spPr>
-        <p:txBody>
-          <a:bodyPr>
-            <a:normAutofit fontScale="92500" lnSpcReduction="20000"/>
-          </a:bodyPr>
-          <a:lstStyle/>
-          <a:p>
-            <a:pPr algn="l"/>
-            <a:r>
-              <a:rPr lang="en-US" sz="1800" b="1" dirty="0" err="1"/>
-              <a:t>service_list</a:t>
-            </a:r>
-            <a:r>
-              <a:rPr lang="en-US" sz="1800" b="1" dirty="0"/>
-              <a:t>:</a:t>
-            </a:r>
-          </a:p>
-          <a:p>
-            <a:pPr algn="l"/>
-            <a:r>
-              <a:rPr lang="en-US" sz="1600" dirty="0" err="1"/>
-              <a:t>get_severity</a:t>
-            </a:r>
-            <a:r>
-              <a:rPr lang="en-US" sz="1600" dirty="0"/>
-              <a:t> – ✅</a:t>
-            </a:r>
-          </a:p>
-          <a:p>
-            <a:pPr algn="l"/>
-            <a:r>
-              <a:rPr lang="en-US" sz="1600" dirty="0" err="1"/>
-              <a:t>set_severity</a:t>
-            </a:r>
-            <a:r>
-              <a:rPr lang="en-US" sz="1600" dirty="0"/>
-              <a:t> –  ✅</a:t>
-            </a:r>
-          </a:p>
-          <a:p>
-            <a:pPr algn="l"/>
-            <a:r>
-              <a:rPr lang="en-US" sz="1600" dirty="0" err="1"/>
-              <a:t>get_category</a:t>
-            </a:r>
-            <a:r>
-              <a:rPr lang="en-US" sz="1600" dirty="0"/>
-              <a:t> – ✅</a:t>
-            </a:r>
-          </a:p>
-          <a:p>
-            <a:pPr algn="l"/>
-            <a:r>
-              <a:rPr lang="en-US" sz="1600" dirty="0" err="1"/>
-              <a:t>set_category</a:t>
-            </a:r>
-            <a:r>
-              <a:rPr lang="en-US" sz="1600" dirty="0"/>
-              <a:t> – ✅</a:t>
-            </a:r>
-          </a:p>
-          <a:p>
-            <a:pPr algn="l"/>
-            <a:r>
-              <a:rPr lang="en-US" sz="1600" dirty="0" err="1"/>
-              <a:t>get_filter_by</a:t>
-            </a:r>
-            <a:r>
-              <a:rPr lang="en-US" sz="1600" dirty="0"/>
-              <a:t> – ✅</a:t>
-            </a:r>
-          </a:p>
-          <a:p>
-            <a:pPr algn="l"/>
-            <a:r>
-              <a:rPr lang="en-US" sz="1600" dirty="0" err="1"/>
-              <a:t>set_filter_by</a:t>
-            </a:r>
-            <a:r>
-              <a:rPr lang="en-US" sz="1600" dirty="0"/>
-              <a:t> – ✅</a:t>
-            </a:r>
-          </a:p>
-          <a:p>
-            <a:pPr algn="l"/>
-            <a:r>
-              <a:rPr lang="en-US" sz="1600" dirty="0" err="1"/>
-              <a:t>set_all_devices_filterBy_devices</a:t>
-            </a:r>
-            <a:r>
-              <a:rPr lang="en-US" sz="1600" dirty="0"/>
-              <a:t>(when Filter by is on Devices) – ✅</a:t>
-            </a:r>
-          </a:p>
-          <a:p>
-            <a:pPr algn="l"/>
-            <a:r>
-              <a:rPr lang="en-US" sz="1600" dirty="0" err="1"/>
-              <a:t>get_all_selected_devices_filterBy_devices</a:t>
-            </a:r>
-            <a:r>
-              <a:rPr lang="en-US" sz="1600" dirty="0"/>
-              <a:t>(when Filter by is on Devices) – ✅</a:t>
-            </a:r>
-          </a:p>
-          <a:p>
-            <a:pPr algn="l"/>
-            <a:r>
-              <a:rPr lang="en-US" sz="1600" dirty="0" err="1"/>
-              <a:t>select_device_filterBy_devices</a:t>
-            </a:r>
-            <a:r>
-              <a:rPr lang="en-US" sz="1600" dirty="0"/>
-              <a:t>(when Filter by is on Devices) – ✅</a:t>
-            </a:r>
-          </a:p>
-          <a:p>
-            <a:pPr algn="l"/>
-            <a:r>
-              <a:rPr lang="en-US" sz="1600" dirty="0" err="1"/>
-              <a:t>remove_device_filterBy_devices</a:t>
-            </a:r>
-            <a:r>
-              <a:rPr lang="en-US" sz="1600" dirty="0"/>
-              <a:t>(when Filter by is on Devices) – ✅</a:t>
-            </a:r>
-          </a:p>
-          <a:p>
-            <a:pPr algn="l"/>
-            <a:r>
-              <a:rPr lang="en-US" sz="1600" dirty="0" err="1"/>
-              <a:t>remove_all_devices_filterBy_devices</a:t>
-            </a:r>
-            <a:r>
-              <a:rPr lang="en-US" sz="1600" dirty="0"/>
-              <a:t>(when Filter by is on Devices) – ✅</a:t>
-            </a:r>
-          </a:p>
-          <a:p>
-            <a:pPr algn="l"/>
-            <a:r>
-              <a:rPr lang="en-US" sz="1600" dirty="0" err="1"/>
-              <a:t>get_selected_domain_or_chassis_filterBy_domain_or_chassis</a:t>
-            </a:r>
-            <a:r>
-              <a:rPr lang="en-US" sz="1600" dirty="0"/>
-              <a:t>(when Filter by is on Domain/Chassis) – ✅</a:t>
-            </a:r>
-          </a:p>
-          <a:p>
-            <a:pPr algn="l"/>
-            <a:r>
-              <a:rPr lang="en-US" sz="1600" dirty="0" err="1"/>
-              <a:t>reset_domain_or_chassis_filterBy_domain_or_chassis</a:t>
-            </a:r>
-            <a:r>
-              <a:rPr lang="en-US" sz="1600" dirty="0"/>
-              <a:t>(when Filter by is on Domain/Chassis) – ✅</a:t>
-            </a:r>
-          </a:p>
-          <a:p>
-            <a:pPr algn="l"/>
-            <a:r>
-              <a:rPr lang="en-US" sz="1600" dirty="0" err="1"/>
-              <a:t>click_on_inventory_tree_icon</a:t>
-            </a:r>
-            <a:r>
-              <a:rPr lang="en-US" sz="1600" dirty="0"/>
-              <a:t> - ✅</a:t>
-            </a:r>
-          </a:p>
-          <a:p>
-            <a:pPr algn="l"/>
-            <a:r>
-              <a:rPr lang="en-US" sz="1600" dirty="0" err="1"/>
-              <a:t>select_domain_or_chassis_filterBy_domain_or_chassis</a:t>
-            </a:r>
-            <a:r>
-              <a:rPr lang="en-US" sz="1600" dirty="0"/>
-              <a:t>(when Filter by is on Domain/Chassis) – ✅</a:t>
-            </a:r>
-          </a:p>
-          <a:p>
-            <a:pPr algn="l"/>
-            <a:r>
-              <a:rPr lang="en-US" sz="1600" dirty="0" err="1"/>
-              <a:t>set_all_devices_filterBy_device_type</a:t>
-            </a:r>
-            <a:r>
-              <a:rPr lang="en-US" sz="1600" dirty="0"/>
-              <a:t>(when Filter by is on Device type) –</a:t>
-            </a:r>
-          </a:p>
-          <a:p>
-            <a:pPr algn="l"/>
-            <a:r>
-              <a:rPr lang="en-US" sz="1600" dirty="0" err="1"/>
-              <a:t>get_all_selected_devices_filterBy_device_type</a:t>
-            </a:r>
-            <a:r>
-              <a:rPr lang="en-US" sz="1600" dirty="0"/>
-              <a:t>(when Filter by is on Device type) –</a:t>
-            </a:r>
-          </a:p>
-          <a:p>
-            <a:pPr algn="l"/>
-            <a:r>
-              <a:rPr lang="en-US" sz="1600" dirty="0" err="1"/>
-              <a:t>select_device_type_filterBy_device_type</a:t>
-            </a:r>
-            <a:r>
-              <a:rPr lang="en-US" sz="1600" dirty="0"/>
-              <a:t>(when Filter by is on Device type) –</a:t>
-            </a:r>
-          </a:p>
-          <a:p>
-            <a:pPr algn="l"/>
-            <a:r>
-              <a:rPr lang="en-US" sz="1600" dirty="0" err="1"/>
-              <a:t>remove_device_type_filterBy_device_type</a:t>
-            </a:r>
-            <a:r>
-              <a:rPr lang="en-US" sz="1600" dirty="0"/>
-              <a:t>(when Filter by is on Device type) –</a:t>
-            </a:r>
-          </a:p>
-          <a:p>
-            <a:pPr algn="l"/>
-            <a:r>
-              <a:rPr lang="en-US" sz="1600" dirty="0" err="1"/>
-              <a:t>remove_all_devices_filterBy_device_type</a:t>
-            </a:r>
-            <a:r>
-              <a:rPr lang="en-US" sz="1600" dirty="0"/>
-              <a:t>(when Filter by is on Device type) –</a:t>
-            </a:r>
-          </a:p>
-          <a:p>
-            <a:pPr algn="l"/>
-            <a:r>
-              <a:rPr lang="en-US" sz="1600" dirty="0" err="1"/>
-              <a:t>get_date</a:t>
-            </a:r>
-            <a:r>
-              <a:rPr lang="en-US" sz="1600" dirty="0"/>
-              <a:t> – ✅</a:t>
-            </a:r>
-          </a:p>
-          <a:p>
-            <a:pPr algn="l"/>
-            <a:r>
-              <a:rPr lang="en-US" sz="1600" dirty="0" err="1"/>
-              <a:t>set_date</a:t>
-            </a:r>
-            <a:r>
-              <a:rPr lang="en-US" sz="1600" dirty="0"/>
-              <a:t> – ✅</a:t>
-            </a:r>
-          </a:p>
-          <a:p>
-            <a:pPr algn="l"/>
-            <a:endParaRPr lang="en-US" sz="1600" dirty="0"/>
-          </a:p>
-          <a:p>
-            <a:pPr algn="l"/>
-            <a:endParaRPr lang="en-US" sz="1600" dirty="0"/>
-          </a:p>
-          <a:p>
-            <a:pPr algn="l"/>
-            <a:endParaRPr lang="en-US" sz="1600" dirty="0"/>
-          </a:p>
-          <a:p>
-            <a:pPr algn="l"/>
-            <a:endParaRPr lang="en-US" sz="1600" dirty="0"/>
-          </a:p>
-          <a:p>
-            <a:pPr algn="l"/>
-            <a:endParaRPr lang="en-US" sz="1600" dirty="0"/>
-          </a:p>
-          <a:p>
-            <a:pPr algn="l"/>
-            <a:endParaRPr lang="en-US" sz="1600" dirty="0"/>
-          </a:p>
-        </p:txBody>
-      </p:sp>
-    </p:spTree>
-    <p:extLst>
-      <p:ext uri="{BB962C8B-B14F-4D97-AF65-F5344CB8AC3E}">
-        <p14:creationId xmlns:p14="http://schemas.microsoft.com/office/powerpoint/2010/main" val="3070944660"/>
       </p:ext>
     </p:extLst>
   </p:cSld>
